--- a/CONFIG_TERRAFORM/Terraform_Demo_presentation_Draft0.1.pptx
+++ b/CONFIG_TERRAFORM/Terraform_Demo_presentation_Draft0.1.pptx
@@ -135,7 +135,7 @@
   <pc:docChgLst>
     <pc:chgData name="Sushil Soni, Vodafone" userId="42f61249-e00d-4778-bd06-353e57e7c4e6" providerId="ADAL" clId="{EA7ACA62-6246-40AD-896F-A77B8CEAA7F1}"/>
     <pc:docChg chg="undo custSel addSld delSld modSld sldOrd">
-      <pc:chgData name="Sushil Soni, Vodafone" userId="42f61249-e00d-4778-bd06-353e57e7c4e6" providerId="ADAL" clId="{EA7ACA62-6246-40AD-896F-A77B8CEAA7F1}" dt="2026-02-26T14:59:32.449" v="3108" actId="1076"/>
+      <pc:chgData name="Sushil Soni, Vodafone" userId="42f61249-e00d-4778-bd06-353e57e7c4e6" providerId="ADAL" clId="{EA7ACA62-6246-40AD-896F-A77B8CEAA7F1}" dt="2026-03-02T13:02:23.759" v="3115" actId="1036"/>
       <pc:docMkLst>
         <pc:docMk/>
       </pc:docMkLst>
@@ -337,27 +337,11 @@
           </ac:spMkLst>
         </pc:spChg>
         <pc:spChg chg="add del mod">
-          <ac:chgData name="Sushil Soni, Vodafone" userId="42f61249-e00d-4778-bd06-353e57e7c4e6" providerId="ADAL" clId="{EA7ACA62-6246-40AD-896F-A77B8CEAA7F1}" dt="2026-02-26T04:52:48.530" v="1317" actId="478"/>
-          <ac:spMkLst>
-            <pc:docMk/>
-            <pc:sldMk cId="3065513456" sldId="2147470626"/>
-            <ac:spMk id="4" creationId="{0A8CE0FD-37A3-1495-AE96-1A46FCBD05C3}"/>
-          </ac:spMkLst>
-        </pc:spChg>
-        <pc:spChg chg="add del mod">
           <ac:chgData name="Sushil Soni, Vodafone" userId="42f61249-e00d-4778-bd06-353e57e7c4e6" providerId="ADAL" clId="{EA7ACA62-6246-40AD-896F-A77B8CEAA7F1}" dt="2026-02-26T05:00:47.123" v="1385" actId="1038"/>
           <ac:spMkLst>
             <pc:docMk/>
             <pc:sldMk cId="3065513456" sldId="2147470626"/>
             <ac:spMk id="8" creationId="{62DD295E-4F3D-2C9D-88DB-65E394CF3E6B}"/>
-          </ac:spMkLst>
-        </pc:spChg>
-        <pc:spChg chg="add del mod">
-          <ac:chgData name="Sushil Soni, Vodafone" userId="42f61249-e00d-4778-bd06-353e57e7c4e6" providerId="ADAL" clId="{EA7ACA62-6246-40AD-896F-A77B8CEAA7F1}" dt="2026-02-26T04:53:28.008" v="1340" actId="478"/>
-          <ac:spMkLst>
-            <pc:docMk/>
-            <pc:sldMk cId="3065513456" sldId="2147470626"/>
-            <ac:spMk id="13" creationId="{90E934E5-0572-15EA-959D-81D72444D8EB}"/>
           </ac:spMkLst>
         </pc:spChg>
         <pc:spChg chg="mod">
@@ -384,28 +368,12 @@
             <ac:spMk id="17" creationId="{17FFFEA2-4037-B237-FE69-ABB1C43BADFA}"/>
           </ac:spMkLst>
         </pc:spChg>
-        <pc:spChg chg="del">
-          <ac:chgData name="Sushil Soni, Vodafone" userId="42f61249-e00d-4778-bd06-353e57e7c4e6" providerId="ADAL" clId="{EA7ACA62-6246-40AD-896F-A77B8CEAA7F1}" dt="2026-02-26T04:26:53.734" v="1071" actId="478"/>
-          <ac:spMkLst>
-            <pc:docMk/>
-            <pc:sldMk cId="3065513456" sldId="2147470626"/>
-            <ac:spMk id="19" creationId="{9D19718A-8244-FBAB-43C6-319003540A56}"/>
-          </ac:spMkLst>
-        </pc:spChg>
         <pc:spChg chg="add mod">
           <ac:chgData name="Sushil Soni, Vodafone" userId="42f61249-e00d-4778-bd06-353e57e7c4e6" providerId="ADAL" clId="{EA7ACA62-6246-40AD-896F-A77B8CEAA7F1}" dt="2026-02-26T14:54:29.748" v="3050" actId="255"/>
           <ac:spMkLst>
             <pc:docMk/>
             <pc:sldMk cId="3065513456" sldId="2147470626"/>
             <ac:spMk id="21" creationId="{56906371-0E19-B6BB-71B5-BBF193923358}"/>
-          </ac:spMkLst>
-        </pc:spChg>
-        <pc:spChg chg="del mod">
-          <ac:chgData name="Sushil Soni, Vodafone" userId="42f61249-e00d-4778-bd06-353e57e7c4e6" providerId="ADAL" clId="{EA7ACA62-6246-40AD-896F-A77B8CEAA7F1}" dt="2026-02-26T04:26:58.826" v="1073" actId="478"/>
-          <ac:spMkLst>
-            <pc:docMk/>
-            <pc:sldMk cId="3065513456" sldId="2147470626"/>
-            <ac:spMk id="27" creationId="{500DCAA8-D6E5-1DDF-82E4-52228C804BD3}"/>
           </ac:spMkLst>
         </pc:spChg>
         <pc:spChg chg="mod">
@@ -430,14 +398,6 @@
             <pc:docMk/>
             <pc:sldMk cId="3065513456" sldId="2147470626"/>
             <ac:spMk id="33" creationId="{1DF2C8BB-C39D-DA0D-3FD2-E958A7AD2C5B}"/>
-          </ac:spMkLst>
-        </pc:spChg>
-        <pc:spChg chg="del">
-          <ac:chgData name="Sushil Soni, Vodafone" userId="42f61249-e00d-4778-bd06-353e57e7c4e6" providerId="ADAL" clId="{EA7ACA62-6246-40AD-896F-A77B8CEAA7F1}" dt="2026-02-26T04:35:07.419" v="1149" actId="478"/>
-          <ac:spMkLst>
-            <pc:docMk/>
-            <pc:sldMk cId="3065513456" sldId="2147470626"/>
-            <ac:spMk id="48" creationId="{1763A8AB-AFF3-8E30-0A40-118D169D0B25}"/>
           </ac:spMkLst>
         </pc:spChg>
         <pc:spChg chg="add mod">
@@ -494,14 +454,6 @@
             <pc:docMk/>
             <pc:sldMk cId="3065513456" sldId="2147470626"/>
             <ac:spMk id="79" creationId="{1FD427C8-3CCC-7460-8598-22A0CA89B1EF}"/>
-          </ac:spMkLst>
-        </pc:spChg>
-        <pc:spChg chg="add del mod">
-          <ac:chgData name="Sushil Soni, Vodafone" userId="42f61249-e00d-4778-bd06-353e57e7c4e6" providerId="ADAL" clId="{EA7ACA62-6246-40AD-896F-A77B8CEAA7F1}" dt="2026-02-26T14:56:51.130" v="3060" actId="478"/>
-          <ac:spMkLst>
-            <pc:docMk/>
-            <pc:sldMk cId="3065513456" sldId="2147470626"/>
-            <ac:spMk id="80" creationId="{F9D7ADB7-C5E0-CACD-8799-8D2F46047D1D}"/>
           </ac:spMkLst>
         </pc:spChg>
         <pc:spChg chg="add mod">
@@ -592,30 +544,6 @@
             <ac:spMk id="97" creationId="{1793245C-D5E3-8852-7EAE-F7B1367F2B9C}"/>
           </ac:spMkLst>
         </pc:spChg>
-        <pc:spChg chg="add del mod">
-          <ac:chgData name="Sushil Soni, Vodafone" userId="42f61249-e00d-4778-bd06-353e57e7c4e6" providerId="ADAL" clId="{EA7ACA62-6246-40AD-896F-A77B8CEAA7F1}" dt="2026-02-26T11:29:46.473" v="2916" actId="478"/>
-          <ac:spMkLst>
-            <pc:docMk/>
-            <pc:sldMk cId="3065513456" sldId="2147470626"/>
-            <ac:spMk id="98" creationId="{A7112A78-91FF-55C8-A998-BFCC5C598386}"/>
-          </ac:spMkLst>
-        </pc:spChg>
-        <pc:spChg chg="add del mod">
-          <ac:chgData name="Sushil Soni, Vodafone" userId="42f61249-e00d-4778-bd06-353e57e7c4e6" providerId="ADAL" clId="{EA7ACA62-6246-40AD-896F-A77B8CEAA7F1}" dt="2026-02-26T11:29:10.326" v="2914" actId="478"/>
-          <ac:spMkLst>
-            <pc:docMk/>
-            <pc:sldMk cId="3065513456" sldId="2147470626"/>
-            <ac:spMk id="99" creationId="{DAE107DE-9B3B-5692-ED57-0C03BBC4BB16}"/>
-          </ac:spMkLst>
-        </pc:spChg>
-        <pc:spChg chg="add mod">
-          <ac:chgData name="Sushil Soni, Vodafone" userId="42f61249-e00d-4778-bd06-353e57e7c4e6" providerId="ADAL" clId="{EA7ACA62-6246-40AD-896F-A77B8CEAA7F1}" dt="2026-02-26T11:30:54.295" v="2920"/>
-          <ac:spMkLst>
-            <pc:docMk/>
-            <pc:sldMk cId="3065513456" sldId="2147470626"/>
-            <ac:spMk id="101" creationId="{68514704-1045-9628-52BA-D4B375D0F429}"/>
-          </ac:spMkLst>
-        </pc:spChg>
         <pc:spChg chg="add mod">
           <ac:chgData name="Sushil Soni, Vodafone" userId="42f61249-e00d-4778-bd06-353e57e7c4e6" providerId="ADAL" clId="{EA7ACA62-6246-40AD-896F-A77B8CEAA7F1}" dt="2026-02-26T11:31:25.007" v="2953" actId="1037"/>
           <ac:spMkLst>
@@ -672,22 +600,6 @@
             <ac:grpSpMk id="44" creationId="{14F63F63-AE77-CB78-82BC-9649FA32EA75}"/>
           </ac:grpSpMkLst>
         </pc:grpChg>
-        <pc:picChg chg="del">
-          <ac:chgData name="Sushil Soni, Vodafone" userId="42f61249-e00d-4778-bd06-353e57e7c4e6" providerId="ADAL" clId="{EA7ACA62-6246-40AD-896F-A77B8CEAA7F1}" dt="2026-02-26T14:57:42.296" v="3062" actId="478"/>
-          <ac:picMkLst>
-            <pc:docMk/>
-            <pc:sldMk cId="3065513456" sldId="2147470626"/>
-            <ac:picMk id="67" creationId="{54EFFEA1-D58C-D5B3-80FD-C559D9A6BE77}"/>
-          </ac:picMkLst>
-        </pc:picChg>
-        <pc:picChg chg="del">
-          <ac:chgData name="Sushil Soni, Vodafone" userId="42f61249-e00d-4778-bd06-353e57e7c4e6" providerId="ADAL" clId="{EA7ACA62-6246-40AD-896F-A77B8CEAA7F1}" dt="2026-02-26T14:57:44.496" v="3063" actId="478"/>
-          <ac:picMkLst>
-            <pc:docMk/>
-            <pc:sldMk cId="3065513456" sldId="2147470626"/>
-            <ac:picMk id="68" creationId="{E3AEE46C-9CC8-65DC-1638-96D7AA26F612}"/>
-          </ac:picMkLst>
-        </pc:picChg>
         <pc:picChg chg="add mod">
           <ac:chgData name="Sushil Soni, Vodafone" userId="42f61249-e00d-4778-bd06-353e57e7c4e6" providerId="ADAL" clId="{EA7ACA62-6246-40AD-896F-A77B8CEAA7F1}" dt="2026-02-26T14:57:50.496" v="3065" actId="1076"/>
           <ac:picMkLst>
@@ -735,14 +647,6 @@
           <pc:docMk/>
           <pc:sldMk cId="2382569774" sldId="2147470627"/>
         </pc:sldMkLst>
-        <pc:spChg chg="del mod">
-          <ac:chgData name="Sushil Soni, Vodafone" userId="42f61249-e00d-4778-bd06-353e57e7c4e6" providerId="ADAL" clId="{EA7ACA62-6246-40AD-896F-A77B8CEAA7F1}" dt="2026-02-26T05:27:37.264" v="1635" actId="478"/>
-          <ac:spMkLst>
-            <pc:docMk/>
-            <pc:sldMk cId="2382569774" sldId="2147470627"/>
-            <ac:spMk id="2" creationId="{11A07454-646A-76A4-B789-61F23E273A80}"/>
-          </ac:spMkLst>
-        </pc:spChg>
         <pc:spChg chg="mod">
           <ac:chgData name="Sushil Soni, Vodafone" userId="42f61249-e00d-4778-bd06-353e57e7c4e6" providerId="ADAL" clId="{EA7ACA62-6246-40AD-896F-A77B8CEAA7F1}" dt="2026-02-25T13:06:32.264" v="901" actId="20577"/>
           <ac:spMkLst>
@@ -760,59 +664,12 @@
           </ac:spMkLst>
         </pc:spChg>
       </pc:sldChg>
-      <pc:sldChg chg="addSp delSp modSp add del mod">
-        <pc:chgData name="Sushil Soni, Vodafone" userId="42f61249-e00d-4778-bd06-353e57e7c4e6" providerId="ADAL" clId="{EA7ACA62-6246-40AD-896F-A77B8CEAA7F1}" dt="2026-02-26T11:29:30.638" v="2915" actId="2696"/>
-        <pc:sldMkLst>
-          <pc:docMk/>
-          <pc:sldMk cId="1330310226" sldId="2147470628"/>
-        </pc:sldMkLst>
-        <pc:spChg chg="del">
-          <ac:chgData name="Sushil Soni, Vodafone" userId="42f61249-e00d-4778-bd06-353e57e7c4e6" providerId="ADAL" clId="{EA7ACA62-6246-40AD-896F-A77B8CEAA7F1}" dt="2026-02-25T14:04:10.787" v="986" actId="478"/>
-          <ac:spMkLst>
-            <pc:docMk/>
-            <pc:sldMk cId="1330310226" sldId="2147470628"/>
-            <ac:spMk id="2" creationId="{54B77AB8-32EA-A124-6CA7-7A11B08AD1E0}"/>
-          </ac:spMkLst>
-        </pc:spChg>
-        <pc:spChg chg="mod">
-          <ac:chgData name="Sushil Soni, Vodafone" userId="42f61249-e00d-4778-bd06-353e57e7c4e6" providerId="ADAL" clId="{EA7ACA62-6246-40AD-896F-A77B8CEAA7F1}" dt="2026-02-25T09:24:18.609" v="852" actId="14100"/>
-          <ac:spMkLst>
-            <pc:docMk/>
-            <pc:sldMk cId="1330310226" sldId="2147470628"/>
-            <ac:spMk id="92" creationId="{44D98E6B-4FFC-4C3E-5106-903ABE55295B}"/>
-          </ac:spMkLst>
-        </pc:spChg>
-        <pc:spChg chg="mod">
-          <ac:chgData name="Sushil Soni, Vodafone" userId="42f61249-e00d-4778-bd06-353e57e7c4e6" providerId="ADAL" clId="{EA7ACA62-6246-40AD-896F-A77B8CEAA7F1}" dt="2026-02-25T14:03:20.370" v="985" actId="1038"/>
-          <ac:spMkLst>
-            <pc:docMk/>
-            <pc:sldMk cId="1330310226" sldId="2147470628"/>
-            <ac:spMk id="122" creationId="{71CD513F-50CF-37C1-BE52-0741D5B505F4}"/>
-          </ac:spMkLst>
-        </pc:spChg>
-      </pc:sldChg>
       <pc:sldChg chg="addSp delSp modSp new mod ord">
         <pc:chgData name="Sushil Soni, Vodafone" userId="42f61249-e00d-4778-bd06-353e57e7c4e6" providerId="ADAL" clId="{EA7ACA62-6246-40AD-896F-A77B8CEAA7F1}" dt="2026-02-26T06:09:12.201" v="2123" actId="207"/>
         <pc:sldMkLst>
           <pc:docMk/>
           <pc:sldMk cId="3991684126" sldId="2147470629"/>
         </pc:sldMkLst>
-        <pc:spChg chg="del mod">
-          <ac:chgData name="Sushil Soni, Vodafone" userId="42f61249-e00d-4778-bd06-353e57e7c4e6" providerId="ADAL" clId="{EA7ACA62-6246-40AD-896F-A77B8CEAA7F1}" dt="2026-02-26T04:19:51.475" v="997" actId="478"/>
-          <ac:spMkLst>
-            <pc:docMk/>
-            <pc:sldMk cId="3991684126" sldId="2147470629"/>
-            <ac:spMk id="2" creationId="{3ABF4D33-D5EA-F01C-A75B-60B78F220FA4}"/>
-          </ac:spMkLst>
-        </pc:spChg>
-        <pc:spChg chg="del">
-          <ac:chgData name="Sushil Soni, Vodafone" userId="42f61249-e00d-4778-bd06-353e57e7c4e6" providerId="ADAL" clId="{EA7ACA62-6246-40AD-896F-A77B8CEAA7F1}" dt="2026-02-26T04:19:26.576" v="990" actId="22"/>
-          <ac:spMkLst>
-            <pc:docMk/>
-            <pc:sldMk cId="3991684126" sldId="2147470629"/>
-            <ac:spMk id="3" creationId="{2EA7CFBC-D011-4799-EC29-EB0DBB067392}"/>
-          </ac:spMkLst>
-        </pc:spChg>
         <pc:spChg chg="mod">
           <ac:chgData name="Sushil Soni, Vodafone" userId="42f61249-e00d-4778-bd06-353e57e7c4e6" providerId="ADAL" clId="{EA7ACA62-6246-40AD-896F-A77B8CEAA7F1}" dt="2026-02-26T06:09:12.201" v="2123" actId="207"/>
           <ac:spMkLst>
@@ -821,22 +678,6 @@
             <ac:spMk id="4" creationId="{F5886D5A-312D-0DDC-BC99-339B19F1CA3F}"/>
           </ac:spMkLst>
         </pc:spChg>
-        <pc:spChg chg="add del mod">
-          <ac:chgData name="Sushil Soni, Vodafone" userId="42f61249-e00d-4778-bd06-353e57e7c4e6" providerId="ADAL" clId="{EA7ACA62-6246-40AD-896F-A77B8CEAA7F1}" dt="2026-02-26T04:21:06.571" v="1005" actId="22"/>
-          <ac:spMkLst>
-            <pc:docMk/>
-            <pc:sldMk cId="3991684126" sldId="2147470629"/>
-            <ac:spMk id="8" creationId="{95EBF741-F9A6-3C5F-B34F-4E759BEF053F}"/>
-          </ac:spMkLst>
-        </pc:spChg>
-        <pc:picChg chg="add del mod ord">
-          <ac:chgData name="Sushil Soni, Vodafone" userId="42f61249-e00d-4778-bd06-353e57e7c4e6" providerId="ADAL" clId="{EA7ACA62-6246-40AD-896F-A77B8CEAA7F1}" dt="2026-02-26T04:20:39.514" v="1004" actId="478"/>
-          <ac:picMkLst>
-            <pc:docMk/>
-            <pc:sldMk cId="3991684126" sldId="2147470629"/>
-            <ac:picMk id="6" creationId="{8D95D7A5-7A62-3047-A0FD-3C01645DCBB9}"/>
-          </ac:picMkLst>
-        </pc:picChg>
         <pc:picChg chg="add mod ord">
           <ac:chgData name="Sushil Soni, Vodafone" userId="42f61249-e00d-4778-bd06-353e57e7c4e6" providerId="ADAL" clId="{EA7ACA62-6246-40AD-896F-A77B8CEAA7F1}" dt="2026-02-26T04:21:23.204" v="1009" actId="14100"/>
           <ac:picMkLst>
@@ -852,14 +693,6 @@
           <pc:docMk/>
           <pc:sldMk cId="3389512670" sldId="2147470630"/>
         </pc:sldMkLst>
-        <pc:spChg chg="del mod">
-          <ac:chgData name="Sushil Soni, Vodafone" userId="42f61249-e00d-4778-bd06-353e57e7c4e6" providerId="ADAL" clId="{EA7ACA62-6246-40AD-896F-A77B8CEAA7F1}" dt="2026-02-26T05:27:21.694" v="1633" actId="478"/>
-          <ac:spMkLst>
-            <pc:docMk/>
-            <pc:sldMk cId="3389512670" sldId="2147470630"/>
-            <ac:spMk id="2" creationId="{6B58A9D7-BDB1-B7E6-9CE4-DBAB9BBF2308}"/>
-          </ac:spMkLst>
-        </pc:spChg>
         <pc:spChg chg="mod">
           <ac:chgData name="Sushil Soni, Vodafone" userId="42f61249-e00d-4778-bd06-353e57e7c4e6" providerId="ADAL" clId="{EA7ACA62-6246-40AD-896F-A77B8CEAA7F1}" dt="2026-02-26T13:19:04.698" v="3045" actId="6549"/>
           <ac:spMkLst>
@@ -876,25 +709,9 @@
             <ac:spMk id="4" creationId="{02F8AB1F-776C-04C7-721A-1E913CD72990}"/>
           </ac:spMkLst>
         </pc:spChg>
-        <pc:spChg chg="add del mod">
-          <ac:chgData name="Sushil Soni, Vodafone" userId="42f61249-e00d-4778-bd06-353e57e7c4e6" providerId="ADAL" clId="{EA7ACA62-6246-40AD-896F-A77B8CEAA7F1}" dt="2026-02-26T10:36:32.187" v="2434" actId="478"/>
-          <ac:spMkLst>
-            <pc:docMk/>
-            <pc:sldMk cId="3389512670" sldId="2147470630"/>
-            <ac:spMk id="5" creationId="{45A820E8-80BB-143E-2AC7-42CB21683752}"/>
-          </ac:spMkLst>
-        </pc:spChg>
-        <pc:spChg chg="add del mod">
-          <ac:chgData name="Sushil Soni, Vodafone" userId="42f61249-e00d-4778-bd06-353e57e7c4e6" providerId="ADAL" clId="{EA7ACA62-6246-40AD-896F-A77B8CEAA7F1}" dt="2026-02-26T10:37:26.959" v="2468" actId="478"/>
-          <ac:spMkLst>
-            <pc:docMk/>
-            <pc:sldMk cId="3389512670" sldId="2147470630"/>
-            <ac:spMk id="6" creationId="{5C6AEF61-FB5D-E5ED-3BC5-86997581EEF7}"/>
-          </ac:spMkLst>
-        </pc:spChg>
       </pc:sldChg>
       <pc:sldChg chg="addSp delSp modSp add mod">
-        <pc:chgData name="Sushil Soni, Vodafone" userId="42f61249-e00d-4778-bd06-353e57e7c4e6" providerId="ADAL" clId="{EA7ACA62-6246-40AD-896F-A77B8CEAA7F1}" dt="2026-02-26T14:58:53.609" v="3105" actId="1076"/>
+        <pc:chgData name="Sushil Soni, Vodafone" userId="42f61249-e00d-4778-bd06-353e57e7c4e6" providerId="ADAL" clId="{EA7ACA62-6246-40AD-896F-A77B8CEAA7F1}" dt="2026-03-02T13:02:23.759" v="3115" actId="1036"/>
         <pc:sldMkLst>
           <pc:docMk/>
           <pc:sldMk cId="1998312597" sldId="2147470631"/>
@@ -1004,7 +821,7 @@
           </ac:spMkLst>
         </pc:spChg>
         <pc:spChg chg="mod">
-          <ac:chgData name="Sushil Soni, Vodafone" userId="42f61249-e00d-4778-bd06-353e57e7c4e6" providerId="ADAL" clId="{EA7ACA62-6246-40AD-896F-A77B8CEAA7F1}" dt="2026-02-26T14:54:51.198" v="3054" actId="1036"/>
+          <ac:chgData name="Sushil Soni, Vodafone" userId="42f61249-e00d-4778-bd06-353e57e7c4e6" providerId="ADAL" clId="{EA7ACA62-6246-40AD-896F-A77B8CEAA7F1}" dt="2026-03-02T13:02:23.759" v="3115" actId="1036"/>
           <ac:spMkLst>
             <pc:docMk/>
             <pc:sldMk cId="1998312597" sldId="2147470631"/>
@@ -1139,22 +956,6 @@
             <ac:picMk id="57" creationId="{C98A7ACA-04F0-D51A-BCA2-0E986B175C5B}"/>
           </ac:picMkLst>
         </pc:picChg>
-        <pc:picChg chg="del">
-          <ac:chgData name="Sushil Soni, Vodafone" userId="42f61249-e00d-4778-bd06-353e57e7c4e6" providerId="ADAL" clId="{EA7ACA62-6246-40AD-896F-A77B8CEAA7F1}" dt="2026-02-26T11:24:43.584" v="2808" actId="478"/>
-          <ac:picMkLst>
-            <pc:docMk/>
-            <pc:sldMk cId="1998312597" sldId="2147470631"/>
-            <ac:picMk id="67" creationId="{3B31FCE0-D57F-4C1E-AF0F-629C1A81668D}"/>
-          </ac:picMkLst>
-        </pc:picChg>
-        <pc:picChg chg="del">
-          <ac:chgData name="Sushil Soni, Vodafone" userId="42f61249-e00d-4778-bd06-353e57e7c4e6" providerId="ADAL" clId="{EA7ACA62-6246-40AD-896F-A77B8CEAA7F1}" dt="2026-02-26T11:24:35.432" v="2805" actId="478"/>
-          <ac:picMkLst>
-            <pc:docMk/>
-            <pc:sldMk cId="1998312597" sldId="2147470631"/>
-            <ac:picMk id="68" creationId="{E435FA6D-F0A1-2DFF-F1C0-647351C92614}"/>
-          </ac:picMkLst>
-        </pc:picChg>
         <pc:picChg chg="mod">
           <ac:chgData name="Sushil Soni, Vodafone" userId="42f61249-e00d-4778-bd06-353e57e7c4e6" providerId="ADAL" clId="{EA7ACA62-6246-40AD-896F-A77B8CEAA7F1}" dt="2026-02-26T11:18:19.170" v="2707"/>
           <ac:picMkLst>
@@ -1169,14 +970,6 @@
             <pc:docMk/>
             <pc:sldMk cId="1998312597" sldId="2147470631"/>
             <ac:picMk id="101" creationId="{7F2A7ED6-BA31-F0A5-407E-174777C9EC83}"/>
-          </ac:picMkLst>
-        </pc:picChg>
-        <pc:picChg chg="add del mod">
-          <ac:chgData name="Sushil Soni, Vodafone" userId="42f61249-e00d-4778-bd06-353e57e7c4e6" providerId="ADAL" clId="{EA7ACA62-6246-40AD-896F-A77B8CEAA7F1}" dt="2026-02-26T11:24:58.268" v="2811" actId="478"/>
-          <ac:picMkLst>
-            <pc:docMk/>
-            <pc:sldMk cId="1998312597" sldId="2147470631"/>
-            <ac:picMk id="118" creationId="{31585ED5-EDD0-041E-2C2D-45CB09769901}"/>
           </ac:picMkLst>
         </pc:picChg>
         <pc:picChg chg="add mod">
@@ -1219,14 +1012,6 @@
             <ac:cxnSpMk id="66" creationId="{84CD597B-A19A-B634-7F2D-9403C242FF37}"/>
           </ac:cxnSpMkLst>
         </pc:cxnChg>
-        <pc:cxnChg chg="add del mod">
-          <ac:chgData name="Sushil Soni, Vodafone" userId="42f61249-e00d-4778-bd06-353e57e7c4e6" providerId="ADAL" clId="{EA7ACA62-6246-40AD-896F-A77B8CEAA7F1}" dt="2026-02-26T11:20:32.637" v="2792" actId="478"/>
-          <ac:cxnSpMkLst>
-            <pc:docMk/>
-            <pc:sldMk cId="1998312597" sldId="2147470631"/>
-            <ac:cxnSpMk id="104" creationId="{6B5C3881-FE78-47BE-106F-C479935F97FD}"/>
-          </ac:cxnSpMkLst>
-        </pc:cxnChg>
         <pc:cxnChg chg="add mod">
           <ac:chgData name="Sushil Soni, Vodafone" userId="42f61249-e00d-4778-bd06-353e57e7c4e6" providerId="ADAL" clId="{EA7ACA62-6246-40AD-896F-A77B8CEAA7F1}" dt="2026-02-26T11:21:07.981" v="2800" actId="14100"/>
           <ac:cxnSpMkLst>
@@ -1235,77 +1020,6 @@
             <ac:cxnSpMk id="115" creationId="{147CF99B-6597-C66D-62C5-4667B41FB411}"/>
           </ac:cxnSpMkLst>
         </pc:cxnChg>
-      </pc:sldChg>
-      <pc:sldChg chg="addSp delSp modSp new del mod">
-        <pc:chgData name="Sushil Soni, Vodafone" userId="42f61249-e00d-4778-bd06-353e57e7c4e6" providerId="ADAL" clId="{EA7ACA62-6246-40AD-896F-A77B8CEAA7F1}" dt="2026-02-26T11:59:02.290" v="2966" actId="2696"/>
-        <pc:sldMkLst>
-          <pc:docMk/>
-          <pc:sldMk cId="4234125465" sldId="2147470632"/>
-        </pc:sldMkLst>
-        <pc:spChg chg="del">
-          <ac:chgData name="Sushil Soni, Vodafone" userId="42f61249-e00d-4778-bd06-353e57e7c4e6" providerId="ADAL" clId="{EA7ACA62-6246-40AD-896F-A77B8CEAA7F1}" dt="2026-02-26T11:26:52.078" v="2828" actId="478"/>
-          <ac:spMkLst>
-            <pc:docMk/>
-            <pc:sldMk cId="4234125465" sldId="2147470632"/>
-            <ac:spMk id="2" creationId="{7F04AA08-5002-CCF4-6B19-A6ACAFB42861}"/>
-          </ac:spMkLst>
-        </pc:spChg>
-        <pc:spChg chg="del">
-          <ac:chgData name="Sushil Soni, Vodafone" userId="42f61249-e00d-4778-bd06-353e57e7c4e6" providerId="ADAL" clId="{EA7ACA62-6246-40AD-896F-A77B8CEAA7F1}" dt="2026-02-26T10:16:46.164" v="2281" actId="478"/>
-          <ac:spMkLst>
-            <pc:docMk/>
-            <pc:sldMk cId="4234125465" sldId="2147470632"/>
-            <ac:spMk id="3" creationId="{1848E58D-F7C3-0614-AEC5-E1094B46E28E}"/>
-          </ac:spMkLst>
-        </pc:spChg>
-        <pc:spChg chg="del">
-          <ac:chgData name="Sushil Soni, Vodafone" userId="42f61249-e00d-4778-bd06-353e57e7c4e6" providerId="ADAL" clId="{EA7ACA62-6246-40AD-896F-A77B8CEAA7F1}" dt="2026-02-26T11:25:55.804" v="2815" actId="478"/>
-          <ac:spMkLst>
-            <pc:docMk/>
-            <pc:sldMk cId="4234125465" sldId="2147470632"/>
-            <ac:spMk id="4" creationId="{35CBC5BB-D048-BA85-BDCD-D0C08405120B}"/>
-          </ac:spMkLst>
-        </pc:spChg>
-        <pc:spChg chg="add del mod">
-          <ac:chgData name="Sushil Soni, Vodafone" userId="42f61249-e00d-4778-bd06-353e57e7c4e6" providerId="ADAL" clId="{EA7ACA62-6246-40AD-896F-A77B8CEAA7F1}" dt="2026-02-26T11:58:25.023" v="2961" actId="478"/>
-          <ac:spMkLst>
-            <pc:docMk/>
-            <pc:sldMk cId="4234125465" sldId="2147470632"/>
-            <ac:spMk id="9" creationId="{5AB848EE-488C-E400-F2B3-1EB26C716E9E}"/>
-          </ac:spMkLst>
-        </pc:spChg>
-        <pc:spChg chg="add del mod">
-          <ac:chgData name="Sushil Soni, Vodafone" userId="42f61249-e00d-4778-bd06-353e57e7c4e6" providerId="ADAL" clId="{EA7ACA62-6246-40AD-896F-A77B8CEAA7F1}" dt="2026-02-26T11:58:25.023" v="2961" actId="478"/>
-          <ac:spMkLst>
-            <pc:docMk/>
-            <pc:sldMk cId="4234125465" sldId="2147470632"/>
-            <ac:spMk id="10" creationId="{F0742EE9-B16D-52DC-B2DA-6435E3D455E1}"/>
-          </ac:spMkLst>
-        </pc:spChg>
-        <pc:spChg chg="add del mod">
-          <ac:chgData name="Sushil Soni, Vodafone" userId="42f61249-e00d-4778-bd06-353e57e7c4e6" providerId="ADAL" clId="{EA7ACA62-6246-40AD-896F-A77B8CEAA7F1}" dt="2026-02-26T11:58:27.089" v="2962" actId="478"/>
-          <ac:spMkLst>
-            <pc:docMk/>
-            <pc:sldMk cId="4234125465" sldId="2147470632"/>
-            <ac:spMk id="11" creationId="{4AA7A625-2C88-B9AE-A83D-0DADA6DC06DB}"/>
-          </ac:spMkLst>
-        </pc:spChg>
-        <pc:picChg chg="add del mod">
-          <ac:chgData name="Sushil Soni, Vodafone" userId="42f61249-e00d-4778-bd06-353e57e7c4e6" providerId="ADAL" clId="{EA7ACA62-6246-40AD-896F-A77B8CEAA7F1}" dt="2026-02-26T11:25:57.836" v="2816" actId="478"/>
-          <ac:picMkLst>
-            <pc:docMk/>
-            <pc:sldMk cId="4234125465" sldId="2147470632"/>
-            <ac:picMk id="6" creationId="{C765F4D1-03C7-2D20-87AF-D7376C6606F1}"/>
-          </ac:picMkLst>
-        </pc:picChg>
-        <pc:picChg chg="add del mod">
-          <ac:chgData name="Sushil Soni, Vodafone" userId="42f61249-e00d-4778-bd06-353e57e7c4e6" providerId="ADAL" clId="{EA7ACA62-6246-40AD-896F-A77B8CEAA7F1}" dt="2026-02-26T11:58:25.023" v="2961" actId="478"/>
-          <ac:picMkLst>
-            <pc:docMk/>
-            <pc:sldMk cId="4234125465" sldId="2147470632"/>
-            <ac:picMk id="8" creationId="{F02C452F-B351-D1A4-A221-1BF07832639C}"/>
-          </ac:picMkLst>
-        </pc:picChg>
       </pc:sldChg>
     </pc:docChg>
   </pc:docChgLst>
@@ -1394,7 +1108,7 @@
           <a:p>
             <a:fld id="{92D18CE4-0E85-4CD6-9C73-4BBCE6E1D6F1}" type="datetimeFigureOut">
               <a:rPr lang="en-US" smtClean="0"/>
-              <a:t>2/24/2026</a:t>
+              <a:t>3/2/2026</a:t>
             </a:fld>
             <a:endParaRPr lang="en-US"/>
           </a:p>
@@ -2212,7 +1926,7 @@
           <a:p>
             <a:fld id="{36B8AB9A-4982-5343-A59F-B510231EE64F}" type="datetime4">
               <a:rPr lang="en-GB" smtClean="0"/>
-              <a:t>24 February 2026</a:t>
+              <a:t>02 March 2026</a:t>
             </a:fld>
             <a:endParaRPr lang="en-GB"/>
           </a:p>
@@ -2421,7 +2135,7 @@
           <a:p>
             <a:fld id="{AC0739BA-61C9-3A46-938B-A59A0BB8CA5E}" type="datetime4">
               <a:rPr lang="en-GB" smtClean="0"/>
-              <a:t>24 February 2026</a:t>
+              <a:t>02 March 2026</a:t>
             </a:fld>
             <a:endParaRPr lang="en-GB"/>
           </a:p>
@@ -2630,7 +2344,7 @@
           <a:p>
             <a:fld id="{E4410CFC-2243-424E-BF28-D5CEE646A580}" type="datetime4">
               <a:rPr lang="en-GB" smtClean="0"/>
-              <a:t>24 February 2026</a:t>
+              <a:t>02 March 2026</a:t>
             </a:fld>
             <a:endParaRPr lang="en-GB"/>
           </a:p>
@@ -2747,7 +2461,7 @@
           <a:p>
             <a:fld id="{783B7672-5FCC-A246-9206-3CFAAA3A18CC}" type="datetime4">
               <a:rPr lang="en-GB" smtClean="0"/>
-              <a:t>24 February 2026</a:t>
+              <a:t>02 March 2026</a:t>
             </a:fld>
             <a:endParaRPr lang="en-GB" dirty="0"/>
           </a:p>
@@ -2966,7 +2680,7 @@
           <a:p>
             <a:fld id="{AE7B89AC-F697-9C4E-A7D8-C177B3B47A01}" type="datetime4">
               <a:rPr lang="en-GB" smtClean="0"/>
-              <a:t>24 February 2026</a:t>
+              <a:t>02 March 2026</a:t>
             </a:fld>
             <a:endParaRPr lang="en-GB"/>
           </a:p>
@@ -3199,7 +2913,7 @@
           <a:p>
             <a:fld id="{16A608D5-C657-DC42-A1B2-26A46C8A02FA}" type="datetime4">
               <a:rPr lang="en-GB" smtClean="0"/>
-              <a:t>24 February 2026</a:t>
+              <a:t>02 March 2026</a:t>
             </a:fld>
             <a:endParaRPr lang="en-GB"/>
           </a:p>
@@ -3432,7 +3146,7 @@
           <a:p>
             <a:fld id="{EB7769DD-D272-D646-A257-0453CD467C3E}" type="datetime4">
               <a:rPr lang="en-GB" smtClean="0"/>
-              <a:t>24 February 2026</a:t>
+              <a:t>02 March 2026</a:t>
             </a:fld>
             <a:endParaRPr lang="en-GB"/>
           </a:p>
@@ -3706,7 +3420,7 @@
           <a:p>
             <a:fld id="{B545ED23-7495-1646-8BCB-5A6FF7F21C49}" type="datetime4">
               <a:rPr lang="en-GB" smtClean="0"/>
-              <a:t>24 February 2026</a:t>
+              <a:t>02 March 2026</a:t>
             </a:fld>
             <a:endParaRPr lang="en-GB"/>
           </a:p>
@@ -3912,7 +3626,7 @@
           <a:p>
             <a:fld id="{7B5EE47C-76BC-9249-A0A3-BD7DE5F5A677}" type="datetime4">
               <a:rPr lang="en-GB" smtClean="0"/>
-              <a:t>24 February 2026</a:t>
+              <a:t>02 March 2026</a:t>
             </a:fld>
             <a:endParaRPr lang="en-GB"/>
           </a:p>
@@ -6832,7 +6546,7 @@
           <a:p>
             <a:fld id="{94BF2B5B-A0CD-B640-AD88-7E3A5F9BF4C6}" type="datetime4">
               <a:rPr lang="en-GB" smtClean="0"/>
-              <a:t>24 February 2026</a:t>
+              <a:t>02 March 2026</a:t>
             </a:fld>
             <a:endParaRPr lang="en-GB"/>
           </a:p>
@@ -7093,7 +6807,7 @@
           <a:p>
             <a:fld id="{137C6EB4-D3FB-4040-8A1F-BED3E076871F}" type="datetime4">
               <a:rPr lang="en-GB" smtClean="0"/>
-              <a:t>24 February 2026</a:t>
+              <a:t>02 March 2026</a:t>
             </a:fld>
             <a:endParaRPr lang="en-GB"/>
           </a:p>
@@ -7354,7 +7068,7 @@
           <a:p>
             <a:fld id="{9DADE049-1891-1449-9636-1CF55F225DAA}" type="datetime4">
               <a:rPr lang="en-GB" smtClean="0"/>
-              <a:t>24 February 2026</a:t>
+              <a:t>02 March 2026</a:t>
             </a:fld>
             <a:endParaRPr lang="en-GB"/>
           </a:p>
@@ -7694,7 +7408,7 @@
           <a:p>
             <a:fld id="{43F9EC2C-6771-AF47-897F-6EA10AAE18DD}" type="datetime4">
               <a:rPr lang="en-GB" smtClean="0"/>
-              <a:t>24 February 2026</a:t>
+              <a:t>02 March 2026</a:t>
             </a:fld>
             <a:endParaRPr lang="en-GB" dirty="0"/>
           </a:p>
@@ -21204,7 +20918,7 @@
         </p:nvSpPr>
         <p:spPr>
           <a:xfrm>
-            <a:off x="7622938" y="539244"/>
+            <a:off x="7622938" y="620269"/>
             <a:ext cx="1979253" cy="276612"/>
           </a:xfrm>
           <a:prstGeom prst="rect">

--- a/CONFIG_TERRAFORM/Terraform_Demo_presentation_Draft0.1.pptx
+++ b/CONFIG_TERRAFORM/Terraform_Demo_presentation_Draft0.1.pptx
@@ -7,15 +7,14 @@
     <p:sldMasterId id="2147483836" r:id="rId3"/>
   </p:sldMasterIdLst>
   <p:notesMasterIdLst>
-    <p:notesMasterId r:id="rId10"/>
+    <p:notesMasterId r:id="rId9"/>
   </p:notesMasterIdLst>
   <p:sldIdLst>
     <p:sldId id="2147470630" r:id="rId4"/>
-    <p:sldId id="2147375129" r:id="rId5"/>
-    <p:sldId id="2147470629" r:id="rId6"/>
-    <p:sldId id="2147470626" r:id="rId7"/>
-    <p:sldId id="2147470631" r:id="rId8"/>
-    <p:sldId id="2147470627" r:id="rId9"/>
+    <p:sldId id="2147470629" r:id="rId5"/>
+    <p:sldId id="2147470626" r:id="rId6"/>
+    <p:sldId id="2147470631" r:id="rId7"/>
+    <p:sldId id="2147470627" r:id="rId8"/>
   </p:sldIdLst>
   <p:sldSz cx="12192000" cy="6858000"/>
   <p:notesSz cx="6858000" cy="9144000"/>
@@ -135,192 +134,16 @@
   <pc:docChgLst>
     <pc:chgData name="Sushil Soni, Vodafone" userId="42f61249-e00d-4778-bd06-353e57e7c4e6" providerId="ADAL" clId="{EA7ACA62-6246-40AD-896F-A77B8CEAA7F1}"/>
     <pc:docChg chg="undo custSel addSld delSld modSld sldOrd">
-      <pc:chgData name="Sushil Soni, Vodafone" userId="42f61249-e00d-4778-bd06-353e57e7c4e6" providerId="ADAL" clId="{EA7ACA62-6246-40AD-896F-A77B8CEAA7F1}" dt="2026-03-02T13:02:23.759" v="3115" actId="1036"/>
+      <pc:chgData name="Sushil Soni, Vodafone" userId="42f61249-e00d-4778-bd06-353e57e7c4e6" providerId="ADAL" clId="{EA7ACA62-6246-40AD-896F-A77B8CEAA7F1}" dt="2026-03-04T10:29:05.173" v="3121" actId="108"/>
       <pc:docMkLst>
         <pc:docMk/>
       </pc:docMkLst>
-      <pc:sldChg chg="modSp add mod ord modTransition">
-        <pc:chgData name="Sushil Soni, Vodafone" userId="42f61249-e00d-4778-bd06-353e57e7c4e6" providerId="ADAL" clId="{EA7ACA62-6246-40AD-896F-A77B8CEAA7F1}" dt="2026-02-26T13:18:49.302" v="3044" actId="1035"/>
+      <pc:sldChg chg="modSp add del mod ord modTransition">
+        <pc:chgData name="Sushil Soni, Vodafone" userId="42f61249-e00d-4778-bd06-353e57e7c4e6" providerId="ADAL" clId="{EA7ACA62-6246-40AD-896F-A77B8CEAA7F1}" dt="2026-03-04T10:28:47.780" v="3116" actId="2696"/>
         <pc:sldMkLst>
           <pc:docMk/>
           <pc:sldMk cId="2129696808" sldId="2147375129"/>
         </pc:sldMkLst>
-        <pc:spChg chg="mod">
-          <ac:chgData name="Sushil Soni, Vodafone" userId="42f61249-e00d-4778-bd06-353e57e7c4e6" providerId="ADAL" clId="{EA7ACA62-6246-40AD-896F-A77B8CEAA7F1}" dt="2026-02-26T13:18:49.302" v="3044" actId="1035"/>
-          <ac:spMkLst>
-            <pc:docMk/>
-            <pc:sldMk cId="2129696808" sldId="2147375129"/>
-            <ac:spMk id="3" creationId="{0D93DBF0-B164-F56A-7828-972131196791}"/>
-          </ac:spMkLst>
-        </pc:spChg>
-        <pc:spChg chg="mod">
-          <ac:chgData name="Sushil Soni, Vodafone" userId="42f61249-e00d-4778-bd06-353e57e7c4e6" providerId="ADAL" clId="{EA7ACA62-6246-40AD-896F-A77B8CEAA7F1}" dt="2026-02-26T13:18:49.302" v="3044" actId="1035"/>
-          <ac:spMkLst>
-            <pc:docMk/>
-            <pc:sldMk cId="2129696808" sldId="2147375129"/>
-            <ac:spMk id="21" creationId="{ADD2E85E-767A-E467-5AF5-40EDBDF9AC12}"/>
-          </ac:spMkLst>
-        </pc:spChg>
-        <pc:spChg chg="mod">
-          <ac:chgData name="Sushil Soni, Vodafone" userId="42f61249-e00d-4778-bd06-353e57e7c4e6" providerId="ADAL" clId="{EA7ACA62-6246-40AD-896F-A77B8CEAA7F1}" dt="2026-02-26T13:18:49.302" v="3044" actId="1035"/>
-          <ac:spMkLst>
-            <pc:docMk/>
-            <pc:sldMk cId="2129696808" sldId="2147375129"/>
-            <ac:spMk id="22" creationId="{4A415BE3-E5B3-487B-2ABD-7341F59B5231}"/>
-          </ac:spMkLst>
-        </pc:spChg>
-        <pc:spChg chg="mod">
-          <ac:chgData name="Sushil Soni, Vodafone" userId="42f61249-e00d-4778-bd06-353e57e7c4e6" providerId="ADAL" clId="{EA7ACA62-6246-40AD-896F-A77B8CEAA7F1}" dt="2026-02-26T13:18:49.302" v="3044" actId="1035"/>
-          <ac:spMkLst>
-            <pc:docMk/>
-            <pc:sldMk cId="2129696808" sldId="2147375129"/>
-            <ac:spMk id="32" creationId="{1C7521D4-1D27-3EDF-AADD-8DFA1958F7DD}"/>
-          </ac:spMkLst>
-        </pc:spChg>
-        <pc:spChg chg="mod">
-          <ac:chgData name="Sushil Soni, Vodafone" userId="42f61249-e00d-4778-bd06-353e57e7c4e6" providerId="ADAL" clId="{EA7ACA62-6246-40AD-896F-A77B8CEAA7F1}" dt="2026-02-26T13:18:49.302" v="3044" actId="1035"/>
-          <ac:spMkLst>
-            <pc:docMk/>
-            <pc:sldMk cId="2129696808" sldId="2147375129"/>
-            <ac:spMk id="34" creationId="{FDE6158D-99DB-63F1-8853-E1324911C9D4}"/>
-          </ac:spMkLst>
-        </pc:spChg>
-        <pc:spChg chg="mod">
-          <ac:chgData name="Sushil Soni, Vodafone" userId="42f61249-e00d-4778-bd06-353e57e7c4e6" providerId="ADAL" clId="{EA7ACA62-6246-40AD-896F-A77B8CEAA7F1}" dt="2026-02-26T13:18:49.302" v="3044" actId="1035"/>
-          <ac:spMkLst>
-            <pc:docMk/>
-            <pc:sldMk cId="2129696808" sldId="2147375129"/>
-            <ac:spMk id="41" creationId="{C3AAE0E8-4A9C-902B-9CE7-D092465ACECC}"/>
-          </ac:spMkLst>
-        </pc:spChg>
-        <pc:spChg chg="mod ord">
-          <ac:chgData name="Sushil Soni, Vodafone" userId="42f61249-e00d-4778-bd06-353e57e7c4e6" providerId="ADAL" clId="{EA7ACA62-6246-40AD-896F-A77B8CEAA7F1}" dt="2026-02-26T13:18:49.302" v="3044" actId="1035"/>
-          <ac:spMkLst>
-            <pc:docMk/>
-            <pc:sldMk cId="2129696808" sldId="2147375129"/>
-            <ac:spMk id="44" creationId="{0261EAEB-C81A-A42E-593C-EBCB2367AD85}"/>
-          </ac:spMkLst>
-        </pc:spChg>
-        <pc:spChg chg="mod">
-          <ac:chgData name="Sushil Soni, Vodafone" userId="42f61249-e00d-4778-bd06-353e57e7c4e6" providerId="ADAL" clId="{EA7ACA62-6246-40AD-896F-A77B8CEAA7F1}" dt="2026-02-26T13:18:49.302" v="3044" actId="1035"/>
-          <ac:spMkLst>
-            <pc:docMk/>
-            <pc:sldMk cId="2129696808" sldId="2147375129"/>
-            <ac:spMk id="45" creationId="{FCE7E6DE-38A2-BD46-48A8-1EA82BAC20E5}"/>
-          </ac:spMkLst>
-        </pc:spChg>
-        <pc:spChg chg="mod">
-          <ac:chgData name="Sushil Soni, Vodafone" userId="42f61249-e00d-4778-bd06-353e57e7c4e6" providerId="ADAL" clId="{EA7ACA62-6246-40AD-896F-A77B8CEAA7F1}" dt="2026-02-26T13:18:36.455" v="3036" actId="1035"/>
-          <ac:spMkLst>
-            <pc:docMk/>
-            <pc:sldMk cId="2129696808" sldId="2147375129"/>
-            <ac:spMk id="47" creationId="{FCCFEEEA-839C-AB8F-3286-5B701F1B3015}"/>
-          </ac:spMkLst>
-        </pc:spChg>
-        <pc:spChg chg="mod">
-          <ac:chgData name="Sushil Soni, Vodafone" userId="42f61249-e00d-4778-bd06-353e57e7c4e6" providerId="ADAL" clId="{EA7ACA62-6246-40AD-896F-A77B8CEAA7F1}" dt="2026-02-26T13:18:36.455" v="3036" actId="1035"/>
-          <ac:spMkLst>
-            <pc:docMk/>
-            <pc:sldMk cId="2129696808" sldId="2147375129"/>
-            <ac:spMk id="48" creationId="{5B64B5D5-352A-7792-C681-223F055B6771}"/>
-          </ac:spMkLst>
-        </pc:spChg>
-        <pc:spChg chg="mod">
-          <ac:chgData name="Sushil Soni, Vodafone" userId="42f61249-e00d-4778-bd06-353e57e7c4e6" providerId="ADAL" clId="{EA7ACA62-6246-40AD-896F-A77B8CEAA7F1}" dt="2026-02-26T13:18:36.455" v="3036" actId="1035"/>
-          <ac:spMkLst>
-            <pc:docMk/>
-            <pc:sldMk cId="2129696808" sldId="2147375129"/>
-            <ac:spMk id="53" creationId="{A8E66689-D857-E283-C306-EEB31C714430}"/>
-          </ac:spMkLst>
-        </pc:spChg>
-        <pc:spChg chg="mod">
-          <ac:chgData name="Sushil Soni, Vodafone" userId="42f61249-e00d-4778-bd06-353e57e7c4e6" providerId="ADAL" clId="{EA7ACA62-6246-40AD-896F-A77B8CEAA7F1}" dt="2026-02-26T13:18:24.607" v="3024" actId="1037"/>
-          <ac:spMkLst>
-            <pc:docMk/>
-            <pc:sldMk cId="2129696808" sldId="2147375129"/>
-            <ac:spMk id="57" creationId="{40C832D6-A556-151D-5FFE-2FA54EC048C0}"/>
-          </ac:spMkLst>
-        </pc:spChg>
-        <pc:spChg chg="mod">
-          <ac:chgData name="Sushil Soni, Vodafone" userId="42f61249-e00d-4778-bd06-353e57e7c4e6" providerId="ADAL" clId="{EA7ACA62-6246-40AD-896F-A77B8CEAA7F1}" dt="2026-02-26T13:18:16.826" v="3016" actId="1076"/>
-          <ac:spMkLst>
-            <pc:docMk/>
-            <pc:sldMk cId="2129696808" sldId="2147375129"/>
-            <ac:spMk id="63" creationId="{16F8E527-D9DA-2629-C9F0-78B4D1C5F11E}"/>
-          </ac:spMkLst>
-        </pc:spChg>
-        <pc:spChg chg="mod">
-          <ac:chgData name="Sushil Soni, Vodafone" userId="42f61249-e00d-4778-bd06-353e57e7c4e6" providerId="ADAL" clId="{EA7ACA62-6246-40AD-896F-A77B8CEAA7F1}" dt="2026-02-26T13:18:16.826" v="3016" actId="1076"/>
-          <ac:spMkLst>
-            <pc:docMk/>
-            <pc:sldMk cId="2129696808" sldId="2147375129"/>
-            <ac:spMk id="65" creationId="{8D3AE9CB-80C5-8620-BDC4-C4E47A240943}"/>
-          </ac:spMkLst>
-        </pc:spChg>
-        <pc:spChg chg="mod">
-          <ac:chgData name="Sushil Soni, Vodafone" userId="42f61249-e00d-4778-bd06-353e57e7c4e6" providerId="ADAL" clId="{EA7ACA62-6246-40AD-896F-A77B8CEAA7F1}" dt="2026-02-26T13:18:16.826" v="3016" actId="1076"/>
-          <ac:spMkLst>
-            <pc:docMk/>
-            <pc:sldMk cId="2129696808" sldId="2147375129"/>
-            <ac:spMk id="67" creationId="{A1165CCC-6127-7E00-28E0-53F2C9B6331E}"/>
-          </ac:spMkLst>
-        </pc:spChg>
-        <pc:spChg chg="mod">
-          <ac:chgData name="Sushil Soni, Vodafone" userId="42f61249-e00d-4778-bd06-353e57e7c4e6" providerId="ADAL" clId="{EA7ACA62-6246-40AD-896F-A77B8CEAA7F1}" dt="2026-02-26T13:18:16.826" v="3016" actId="1076"/>
-          <ac:spMkLst>
-            <pc:docMk/>
-            <pc:sldMk cId="2129696808" sldId="2147375129"/>
-            <ac:spMk id="68" creationId="{29DBC2D7-B9D0-7449-A308-DC3F21E56C96}"/>
-          </ac:spMkLst>
-        </pc:spChg>
-        <pc:spChg chg="mod">
-          <ac:chgData name="Sushil Soni, Vodafone" userId="42f61249-e00d-4778-bd06-353e57e7c4e6" providerId="ADAL" clId="{EA7ACA62-6246-40AD-896F-A77B8CEAA7F1}" dt="2026-02-26T13:18:36.455" v="3036" actId="1035"/>
-          <ac:spMkLst>
-            <pc:docMk/>
-            <pc:sldMk cId="2129696808" sldId="2147375129"/>
-            <ac:spMk id="72" creationId="{8124772D-680A-DF78-6685-829FD1B286EA}"/>
-          </ac:spMkLst>
-        </pc:spChg>
-        <pc:spChg chg="mod">
-          <ac:chgData name="Sushil Soni, Vodafone" userId="42f61249-e00d-4778-bd06-353e57e7c4e6" providerId="ADAL" clId="{EA7ACA62-6246-40AD-896F-A77B8CEAA7F1}" dt="2026-02-26T13:18:04.373" v="3015" actId="1076"/>
-          <ac:spMkLst>
-            <pc:docMk/>
-            <pc:sldMk cId="2129696808" sldId="2147375129"/>
-            <ac:spMk id="74" creationId="{9677193B-D9AC-DACD-9F3E-FF868C34145B}"/>
-          </ac:spMkLst>
-        </pc:spChg>
-        <pc:picChg chg="mod">
-          <ac:chgData name="Sushil Soni, Vodafone" userId="42f61249-e00d-4778-bd06-353e57e7c4e6" providerId="ADAL" clId="{EA7ACA62-6246-40AD-896F-A77B8CEAA7F1}" dt="2026-02-26T13:18:49.302" v="3044" actId="1035"/>
-          <ac:picMkLst>
-            <pc:docMk/>
-            <pc:sldMk cId="2129696808" sldId="2147375129"/>
-            <ac:picMk id="5" creationId="{3791A827-2765-2F43-53CF-1FA46AA85B7F}"/>
-          </ac:picMkLst>
-        </pc:picChg>
-        <pc:picChg chg="mod">
-          <ac:chgData name="Sushil Soni, Vodafone" userId="42f61249-e00d-4778-bd06-353e57e7c4e6" providerId="ADAL" clId="{EA7ACA62-6246-40AD-896F-A77B8CEAA7F1}" dt="2026-02-26T13:18:49.302" v="3044" actId="1035"/>
-          <ac:picMkLst>
-            <pc:docMk/>
-            <pc:sldMk cId="2129696808" sldId="2147375129"/>
-            <ac:picMk id="43" creationId="{814B40A2-C139-5806-E653-69D2D5187EDC}"/>
-          </ac:picMkLst>
-        </pc:picChg>
-        <pc:cxnChg chg="mod">
-          <ac:chgData name="Sushil Soni, Vodafone" userId="42f61249-e00d-4778-bd06-353e57e7c4e6" providerId="ADAL" clId="{EA7ACA62-6246-40AD-896F-A77B8CEAA7F1}" dt="2026-02-26T13:18:36.455" v="3036" actId="1035"/>
-          <ac:cxnSpMkLst>
-            <pc:docMk/>
-            <pc:sldMk cId="2129696808" sldId="2147375129"/>
-            <ac:cxnSpMk id="52" creationId="{9CEB3322-552D-4897-9D07-4EC5E1E024F3}"/>
-          </ac:cxnSpMkLst>
-        </pc:cxnChg>
-        <pc:cxnChg chg="mod">
-          <ac:chgData name="Sushil Soni, Vodafone" userId="42f61249-e00d-4778-bd06-353e57e7c4e6" providerId="ADAL" clId="{EA7ACA62-6246-40AD-896F-A77B8CEAA7F1}" dt="2026-02-26T13:18:16.826" v="3016" actId="1076"/>
-          <ac:cxnSpMkLst>
-            <pc:docMk/>
-            <pc:sldMk cId="2129696808" sldId="2147375129"/>
-            <ac:cxnSpMk id="66" creationId="{57609DCE-2AF8-705D-8054-28C16DFAD24D}"/>
-          </ac:cxnSpMkLst>
-        </pc:cxnChg>
       </pc:sldChg>
       <pc:sldChg chg="addSp delSp modSp mod">
         <pc:chgData name="Sushil Soni, Vodafone" userId="42f61249-e00d-4778-bd06-353e57e7c4e6" providerId="ADAL" clId="{EA7ACA62-6246-40AD-896F-A77B8CEAA7F1}" dt="2026-02-26T14:59:32.449" v="3108" actId="1076"/>
@@ -688,13 +511,13 @@
         </pc:picChg>
       </pc:sldChg>
       <pc:sldChg chg="addSp delSp modSp new mod ord">
-        <pc:chgData name="Sushil Soni, Vodafone" userId="42f61249-e00d-4778-bd06-353e57e7c4e6" providerId="ADAL" clId="{EA7ACA62-6246-40AD-896F-A77B8CEAA7F1}" dt="2026-02-26T13:19:04.698" v="3045" actId="6549"/>
+        <pc:chgData name="Sushil Soni, Vodafone" userId="42f61249-e00d-4778-bd06-353e57e7c4e6" providerId="ADAL" clId="{EA7ACA62-6246-40AD-896F-A77B8CEAA7F1}" dt="2026-03-04T10:29:05.173" v="3121" actId="108"/>
         <pc:sldMkLst>
           <pc:docMk/>
           <pc:sldMk cId="3389512670" sldId="2147470630"/>
         </pc:sldMkLst>
         <pc:spChg chg="mod">
-          <ac:chgData name="Sushil Soni, Vodafone" userId="42f61249-e00d-4778-bd06-353e57e7c4e6" providerId="ADAL" clId="{EA7ACA62-6246-40AD-896F-A77B8CEAA7F1}" dt="2026-02-26T13:19:04.698" v="3045" actId="6549"/>
+          <ac:chgData name="Sushil Soni, Vodafone" userId="42f61249-e00d-4778-bd06-353e57e7c4e6" providerId="ADAL" clId="{EA7ACA62-6246-40AD-896F-A77B8CEAA7F1}" dt="2026-03-04T10:29:05.173" v="3121" actId="108"/>
           <ac:spMkLst>
             <pc:docMk/>
             <pc:sldMk cId="3389512670" sldId="2147470630"/>
@@ -1108,7 +931,7 @@
           <a:p>
             <a:fld id="{92D18CE4-0E85-4CD6-9C73-4BBCE6E1D6F1}" type="datetimeFigureOut">
               <a:rPr lang="en-US" smtClean="0"/>
-              <a:t>3/2/2026</a:t>
+              <a:t>3/4/2026</a:t>
             </a:fld>
             <a:endParaRPr lang="en-US"/>
           </a:p>
@@ -1926,7 +1749,7 @@
           <a:p>
             <a:fld id="{36B8AB9A-4982-5343-A59F-B510231EE64F}" type="datetime4">
               <a:rPr lang="en-GB" smtClean="0"/>
-              <a:t>02 March 2026</a:t>
+              <a:t>04 March 2026</a:t>
             </a:fld>
             <a:endParaRPr lang="en-GB"/>
           </a:p>
@@ -2135,7 +1958,7 @@
           <a:p>
             <a:fld id="{AC0739BA-61C9-3A46-938B-A59A0BB8CA5E}" type="datetime4">
               <a:rPr lang="en-GB" smtClean="0"/>
-              <a:t>02 March 2026</a:t>
+              <a:t>04 March 2026</a:t>
             </a:fld>
             <a:endParaRPr lang="en-GB"/>
           </a:p>
@@ -2344,7 +2167,7 @@
           <a:p>
             <a:fld id="{E4410CFC-2243-424E-BF28-D5CEE646A580}" type="datetime4">
               <a:rPr lang="en-GB" smtClean="0"/>
-              <a:t>02 March 2026</a:t>
+              <a:t>04 March 2026</a:t>
             </a:fld>
             <a:endParaRPr lang="en-GB"/>
           </a:p>
@@ -2461,7 +2284,7 @@
           <a:p>
             <a:fld id="{783B7672-5FCC-A246-9206-3CFAAA3A18CC}" type="datetime4">
               <a:rPr lang="en-GB" smtClean="0"/>
-              <a:t>02 March 2026</a:t>
+              <a:t>04 March 2026</a:t>
             </a:fld>
             <a:endParaRPr lang="en-GB" dirty="0"/>
           </a:p>
@@ -2680,7 +2503,7 @@
           <a:p>
             <a:fld id="{AE7B89AC-F697-9C4E-A7D8-C177B3B47A01}" type="datetime4">
               <a:rPr lang="en-GB" smtClean="0"/>
-              <a:t>02 March 2026</a:t>
+              <a:t>04 March 2026</a:t>
             </a:fld>
             <a:endParaRPr lang="en-GB"/>
           </a:p>
@@ -2913,7 +2736,7 @@
           <a:p>
             <a:fld id="{16A608D5-C657-DC42-A1B2-26A46C8A02FA}" type="datetime4">
               <a:rPr lang="en-GB" smtClean="0"/>
-              <a:t>02 March 2026</a:t>
+              <a:t>04 March 2026</a:t>
             </a:fld>
             <a:endParaRPr lang="en-GB"/>
           </a:p>
@@ -3146,7 +2969,7 @@
           <a:p>
             <a:fld id="{EB7769DD-D272-D646-A257-0453CD467C3E}" type="datetime4">
               <a:rPr lang="en-GB" smtClean="0"/>
-              <a:t>02 March 2026</a:t>
+              <a:t>04 March 2026</a:t>
             </a:fld>
             <a:endParaRPr lang="en-GB"/>
           </a:p>
@@ -3420,7 +3243,7 @@
           <a:p>
             <a:fld id="{B545ED23-7495-1646-8BCB-5A6FF7F21C49}" type="datetime4">
               <a:rPr lang="en-GB" smtClean="0"/>
-              <a:t>02 March 2026</a:t>
+              <a:t>04 March 2026</a:t>
             </a:fld>
             <a:endParaRPr lang="en-GB"/>
           </a:p>
@@ -3626,7 +3449,7 @@
           <a:p>
             <a:fld id="{7B5EE47C-76BC-9249-A0A3-BD7DE5F5A677}" type="datetime4">
               <a:rPr lang="en-GB" smtClean="0"/>
-              <a:t>02 March 2026</a:t>
+              <a:t>04 March 2026</a:t>
             </a:fld>
             <a:endParaRPr lang="en-GB"/>
           </a:p>
@@ -6546,7 +6369,7 @@
           <a:p>
             <a:fld id="{94BF2B5B-A0CD-B640-AD88-7E3A5F9BF4C6}" type="datetime4">
               <a:rPr lang="en-GB" smtClean="0"/>
-              <a:t>02 March 2026</a:t>
+              <a:t>04 March 2026</a:t>
             </a:fld>
             <a:endParaRPr lang="en-GB"/>
           </a:p>
@@ -6807,7 +6630,7 @@
           <a:p>
             <a:fld id="{137C6EB4-D3FB-4040-8A1F-BED3E076871F}" type="datetime4">
               <a:rPr lang="en-GB" smtClean="0"/>
-              <a:t>02 March 2026</a:t>
+              <a:t>04 March 2026</a:t>
             </a:fld>
             <a:endParaRPr lang="en-GB"/>
           </a:p>
@@ -7068,7 +6891,7 @@
           <a:p>
             <a:fld id="{9DADE049-1891-1449-9636-1CF55F225DAA}" type="datetime4">
               <a:rPr lang="en-GB" smtClean="0"/>
-              <a:t>02 March 2026</a:t>
+              <a:t>04 March 2026</a:t>
             </a:fld>
             <a:endParaRPr lang="en-GB"/>
           </a:p>
@@ -7408,7 +7231,7 @@
           <a:p>
             <a:fld id="{43F9EC2C-6771-AF47-897F-6EA10AAE18DD}" type="datetime4">
               <a:rPr lang="en-GB" smtClean="0"/>
-              <a:t>02 March 2026</a:t>
+              <a:t>04 March 2026</a:t>
             </a:fld>
             <a:endParaRPr lang="en-GB" dirty="0"/>
           </a:p>
@@ -8627,13 +8450,7 @@
           <a:p>
             <a:r>
               <a:rPr lang="en-US" dirty="0"/>
-              <a:t>Security policy demo-</a:t>
-            </a:r>
-          </a:p>
-          <a:p>
-            <a:r>
-              <a:rPr lang="en-US" dirty="0"/>
-              <a:t>Benefits with Terraform Deployment</a:t>
+              <a:t>. Benefits with Terraform Deployment</a:t>
             </a:r>
           </a:p>
           <a:p>
@@ -8707,1359 +8524,6 @@
 </file>
 
 <file path=ppt/slides/slide2.xml><?xml version="1.0" encoding="utf-8"?>
-<p:sld xmlns:a="http://schemas.openxmlformats.org/drawingml/2006/main" xmlns:r="http://schemas.openxmlformats.org/officeDocument/2006/relationships" xmlns:p="http://schemas.openxmlformats.org/presentationml/2006/main">
-  <p:cSld>
-    <p:spTree>
-      <p:nvGrpSpPr>
-        <p:cNvPr id="1" name="">
-          <a:extLst>
-            <a:ext uri="{FF2B5EF4-FFF2-40B4-BE49-F238E27FC236}">
-              <a16:creationId xmlns:a16="http://schemas.microsoft.com/office/drawing/2014/main" id="{4F6107CA-CE2A-495C-E08E-0C2E24BE4586}"/>
-            </a:ext>
-          </a:extLst>
-        </p:cNvPr>
-        <p:cNvGrpSpPr/>
-        <p:nvPr/>
-      </p:nvGrpSpPr>
-      <p:grpSpPr>
-        <a:xfrm>
-          <a:off x="0" y="0"/>
-          <a:ext cx="0" cy="0"/>
-          <a:chOff x="0" y="0"/>
-          <a:chExt cx="0" cy="0"/>
-        </a:xfrm>
-      </p:grpSpPr>
-      <p:sp>
-        <p:nvSpPr>
-          <p:cNvPr id="44" name="Arrow: Right 43">
-            <a:extLst>
-              <a:ext uri="{FF2B5EF4-FFF2-40B4-BE49-F238E27FC236}">
-                <a16:creationId xmlns:a16="http://schemas.microsoft.com/office/drawing/2014/main" id="{0261EAEB-C81A-A42E-593C-EBCB2367AD85}"/>
-              </a:ext>
-            </a:extLst>
-          </p:cNvPr>
-          <p:cNvSpPr/>
-          <p:nvPr/>
-        </p:nvSpPr>
-        <p:spPr>
-          <a:xfrm>
-            <a:off x="3763887" y="4936005"/>
-            <a:ext cx="747299" cy="340015"/>
-          </a:xfrm>
-          <a:prstGeom prst="rightArrow">
-            <a:avLst/>
-          </a:prstGeom>
-          <a:solidFill>
-            <a:srgbClr val="0070C0"/>
-          </a:solidFill>
-          <a:ln w="25400" cap="flat" cmpd="sng" algn="ctr">
-            <a:noFill/>
-            <a:prstDash val="solid"/>
-          </a:ln>
-          <a:effectLst/>
-        </p:spPr>
-        <p:style>
-          <a:lnRef idx="2">
-            <a:scrgbClr r="0" g="0" b="0"/>
-          </a:lnRef>
-          <a:fillRef idx="1">
-            <a:scrgbClr r="0" g="0" b="0"/>
-          </a:fillRef>
-          <a:effectRef idx="0">
-            <a:scrgbClr r="0" g="0" b="0"/>
-          </a:effectRef>
-          <a:fontRef idx="minor">
-            <a:schemeClr val="lt1"/>
-          </a:fontRef>
-        </p:style>
-        <p:txBody>
-          <a:bodyPr spcFirstLastPara="0" vert="horz" wrap="square" lIns="8467" tIns="8467" rIns="8467" bIns="8467" numCol="1" spcCol="1270" rtlCol="0" anchor="ctr" anchorCtr="0">
-            <a:noAutofit/>
-          </a:bodyPr>
-          <a:lstStyle/>
-          <a:p>
-            <a:pPr algn="ctr" defTabSz="592652">
-              <a:lnSpc>
-                <a:spcPct val="90000"/>
-              </a:lnSpc>
-              <a:spcBef>
-                <a:spcPct val="0"/>
-              </a:spcBef>
-              <a:spcAft>
-                <a:spcPct val="35000"/>
-              </a:spcAft>
-            </a:pPr>
-            <a:endParaRPr lang="en-US" sz="1333" dirty="0">
-              <a:solidFill>
-                <a:srgbClr val="34342B"/>
-              </a:solidFill>
-              <a:latin typeface="Vodafone Rg" pitchFamily="34" charset="0"/>
-            </a:endParaRPr>
-          </a:p>
-        </p:txBody>
-      </p:sp>
-      <p:sp>
-        <p:nvSpPr>
-          <p:cNvPr id="2" name="Title 1">
-            <a:extLst>
-              <a:ext uri="{FF2B5EF4-FFF2-40B4-BE49-F238E27FC236}">
-                <a16:creationId xmlns:a16="http://schemas.microsoft.com/office/drawing/2014/main" id="{A5D333CD-28EB-28CE-EE4F-6CDECCD3EC3D}"/>
-              </a:ext>
-            </a:extLst>
-          </p:cNvPr>
-          <p:cNvSpPr>
-            <a:spLocks noGrp="1"/>
-          </p:cNvSpPr>
-          <p:nvPr>
-            <p:ph type="title"/>
-          </p:nvPr>
-        </p:nvSpPr>
-        <p:spPr>
-          <a:xfrm>
-            <a:off x="334434" y="274638"/>
-            <a:ext cx="11523133" cy="329543"/>
-          </a:xfrm>
-        </p:spPr>
-        <p:txBody>
-          <a:bodyPr/>
-          <a:lstStyle/>
-          <a:p>
-            <a:r>
-              <a:rPr lang="en-GB" sz="2667" dirty="0"/>
-              <a:t>E2E Landing Zone Provisioning </a:t>
-            </a:r>
-            <a:endParaRPr lang="en-US" sz="2667" dirty="0"/>
-          </a:p>
-        </p:txBody>
-      </p:sp>
-      <p:pic>
-        <p:nvPicPr>
-          <p:cNvPr id="16" name="Graphic 15" descr="Shield Tick outline">
-            <a:extLst>
-              <a:ext uri="{FF2B5EF4-FFF2-40B4-BE49-F238E27FC236}">
-                <a16:creationId xmlns:a16="http://schemas.microsoft.com/office/drawing/2014/main" id="{CD4F4823-A74D-0D93-DF7C-6247172E075E}"/>
-              </a:ext>
-            </a:extLst>
-          </p:cNvPr>
-          <p:cNvPicPr>
-            <a:picLocks noChangeAspect="1"/>
-          </p:cNvPicPr>
-          <p:nvPr/>
-        </p:nvPicPr>
-        <p:blipFill>
-          <a:blip r:embed="rId2">
-            <a:extLst>
-              <a:ext uri="{96DAC541-7B7A-43D3-8B79-37D633B846F1}">
-                <asvg:svgBlip xmlns:asvg="http://schemas.microsoft.com/office/drawing/2016/SVG/main" r:embed="rId3"/>
-              </a:ext>
-            </a:extLst>
-          </a:blip>
-          <a:stretch>
-            <a:fillRect/>
-          </a:stretch>
-        </p:blipFill>
-        <p:spPr>
-          <a:xfrm>
-            <a:off x="5614229" y="4367518"/>
-            <a:ext cx="1084175" cy="1136975"/>
-          </a:xfrm>
-          <a:prstGeom prst="rect">
-            <a:avLst/>
-          </a:prstGeom>
-        </p:spPr>
-      </p:pic>
-      <p:sp>
-        <p:nvSpPr>
-          <p:cNvPr id="3" name="Rectangle: Rounded Corners 2">
-            <a:extLst>
-              <a:ext uri="{FF2B5EF4-FFF2-40B4-BE49-F238E27FC236}">
-                <a16:creationId xmlns:a16="http://schemas.microsoft.com/office/drawing/2014/main" id="{0D93DBF0-B164-F56A-7828-972131196791}"/>
-              </a:ext>
-            </a:extLst>
-          </p:cNvPr>
-          <p:cNvSpPr/>
-          <p:nvPr/>
-        </p:nvSpPr>
-        <p:spPr>
-          <a:xfrm>
-            <a:off x="8564643" y="4170311"/>
-            <a:ext cx="3473708" cy="1783637"/>
-          </a:xfrm>
-          <a:prstGeom prst="roundRect">
-            <a:avLst/>
-          </a:prstGeom>
-          <a:noFill/>
-          <a:ln w="57150" cap="flat" cmpd="sng" algn="ctr">
-            <a:solidFill>
-              <a:srgbClr val="0070C0"/>
-            </a:solidFill>
-            <a:prstDash val="solid"/>
-          </a:ln>
-          <a:effectLst/>
-        </p:spPr>
-        <p:style>
-          <a:lnRef idx="2">
-            <a:scrgbClr r="0" g="0" b="0"/>
-          </a:lnRef>
-          <a:fillRef idx="1">
-            <a:scrgbClr r="0" g="0" b="0"/>
-          </a:fillRef>
-          <a:effectRef idx="0">
-            <a:scrgbClr r="0" g="0" b="0"/>
-          </a:effectRef>
-          <a:fontRef idx="minor">
-            <a:schemeClr val="lt1"/>
-          </a:fontRef>
-        </p:style>
-        <p:txBody>
-          <a:bodyPr spcFirstLastPara="0" vert="horz" wrap="square" lIns="8467" tIns="8467" rIns="8467" bIns="8467" numCol="1" spcCol="1270" rtlCol="0" anchor="ctr" anchorCtr="0">
-            <a:noAutofit/>
-          </a:bodyPr>
-          <a:lstStyle/>
-          <a:p>
-            <a:pPr algn="ctr" defTabSz="592652">
-              <a:lnSpc>
-                <a:spcPct val="90000"/>
-              </a:lnSpc>
-              <a:spcBef>
-                <a:spcPct val="0"/>
-              </a:spcBef>
-              <a:spcAft>
-                <a:spcPct val="35000"/>
-              </a:spcAft>
-            </a:pPr>
-            <a:endParaRPr lang="en-US" sz="1333" dirty="0">
-              <a:solidFill>
-                <a:srgbClr val="34342B"/>
-              </a:solidFill>
-              <a:latin typeface="Vodafone Rg" pitchFamily="34" charset="0"/>
-            </a:endParaRPr>
-          </a:p>
-        </p:txBody>
-      </p:sp>
-      <p:pic>
-        <p:nvPicPr>
-          <p:cNvPr id="5" name="Graphic 4" descr="Advertising with solid fill">
-            <a:extLst>
-              <a:ext uri="{FF2B5EF4-FFF2-40B4-BE49-F238E27FC236}">
-                <a16:creationId xmlns:a16="http://schemas.microsoft.com/office/drawing/2014/main" id="{3791A827-2765-2F43-53CF-1FA46AA85B7F}"/>
-              </a:ext>
-            </a:extLst>
-          </p:cNvPr>
-          <p:cNvPicPr>
-            <a:picLocks noChangeAspect="1"/>
-          </p:cNvPicPr>
-          <p:nvPr/>
-        </p:nvPicPr>
-        <p:blipFill>
-          <a:blip r:embed="rId4">
-            <a:extLst>
-              <a:ext uri="{96DAC541-7B7A-43D3-8B79-37D633B846F1}">
-                <asvg:svgBlip xmlns:asvg="http://schemas.microsoft.com/office/drawing/2016/SVG/main" r:embed="rId5"/>
-              </a:ext>
-            </a:extLst>
-          </a:blip>
-          <a:stretch>
-            <a:fillRect/>
-          </a:stretch>
-        </p:blipFill>
-        <p:spPr>
-          <a:xfrm>
-            <a:off x="9611900" y="4453365"/>
-            <a:ext cx="1219200" cy="1219200"/>
-          </a:xfrm>
-          <a:prstGeom prst="rect">
-            <a:avLst/>
-          </a:prstGeom>
-        </p:spPr>
-      </p:pic>
-      <p:sp>
-        <p:nvSpPr>
-          <p:cNvPr id="21" name="TextBox 20">
-            <a:extLst>
-              <a:ext uri="{FF2B5EF4-FFF2-40B4-BE49-F238E27FC236}">
-                <a16:creationId xmlns:a16="http://schemas.microsoft.com/office/drawing/2014/main" id="{ADD2E85E-767A-E467-5AF5-40EDBDF9AC12}"/>
-              </a:ext>
-            </a:extLst>
-          </p:cNvPr>
-          <p:cNvSpPr txBox="1"/>
-          <p:nvPr/>
-        </p:nvSpPr>
-        <p:spPr>
-          <a:xfrm>
-            <a:off x="9657154" y="5516911"/>
-            <a:ext cx="2070467" cy="338376"/>
-          </a:xfrm>
-          <a:prstGeom prst="rect">
-            <a:avLst/>
-          </a:prstGeom>
-        </p:spPr>
-        <p:txBody>
-          <a:bodyPr wrap="square" lIns="0" tIns="0" rIns="0" bIns="0" rtlCol="0">
-            <a:noAutofit/>
-          </a:bodyPr>
-          <a:lstStyle/>
-          <a:p>
-            <a:r>
-              <a:rPr lang="en-US" sz="2400" b="1" dirty="0">
-                <a:latin typeface="Vodafone Rg" pitchFamily="34" charset="0"/>
-              </a:rPr>
-              <a:t>Compute</a:t>
-            </a:r>
-          </a:p>
-        </p:txBody>
-      </p:sp>
-      <p:sp>
-        <p:nvSpPr>
-          <p:cNvPr id="22" name="Rectangle: Rounded Corners 21">
-            <a:extLst>
-              <a:ext uri="{FF2B5EF4-FFF2-40B4-BE49-F238E27FC236}">
-                <a16:creationId xmlns:a16="http://schemas.microsoft.com/office/drawing/2014/main" id="{4A415BE3-E5B3-487B-2ABD-7341F59B5231}"/>
-              </a:ext>
-            </a:extLst>
-          </p:cNvPr>
-          <p:cNvSpPr/>
-          <p:nvPr/>
-        </p:nvSpPr>
-        <p:spPr>
-          <a:xfrm>
-            <a:off x="4410453" y="4281842"/>
-            <a:ext cx="3473708" cy="1783637"/>
-          </a:xfrm>
-          <a:prstGeom prst="roundRect">
-            <a:avLst/>
-          </a:prstGeom>
-          <a:noFill/>
-          <a:ln w="57150" cap="flat" cmpd="sng" algn="ctr">
-            <a:solidFill>
-              <a:srgbClr val="0070C0"/>
-            </a:solidFill>
-            <a:prstDash val="solid"/>
-          </a:ln>
-          <a:effectLst/>
-        </p:spPr>
-        <p:style>
-          <a:lnRef idx="2">
-            <a:scrgbClr r="0" g="0" b="0"/>
-          </a:lnRef>
-          <a:fillRef idx="1">
-            <a:scrgbClr r="0" g="0" b="0"/>
-          </a:fillRef>
-          <a:effectRef idx="0">
-            <a:scrgbClr r="0" g="0" b="0"/>
-          </a:effectRef>
-          <a:fontRef idx="minor">
-            <a:schemeClr val="lt1"/>
-          </a:fontRef>
-        </p:style>
-        <p:txBody>
-          <a:bodyPr spcFirstLastPara="0" vert="horz" wrap="square" lIns="8467" tIns="8467" rIns="8467" bIns="8467" numCol="1" spcCol="1270" rtlCol="0" anchor="ctr" anchorCtr="0">
-            <a:noAutofit/>
-          </a:bodyPr>
-          <a:lstStyle/>
-          <a:p>
-            <a:pPr algn="ctr" defTabSz="592652">
-              <a:lnSpc>
-                <a:spcPct val="90000"/>
-              </a:lnSpc>
-              <a:spcBef>
-                <a:spcPct val="0"/>
-              </a:spcBef>
-              <a:spcAft>
-                <a:spcPct val="35000"/>
-              </a:spcAft>
-            </a:pPr>
-            <a:endParaRPr lang="en-US" sz="1333" dirty="0">
-              <a:solidFill>
-                <a:srgbClr val="34342B"/>
-              </a:solidFill>
-              <a:latin typeface="Vodafone Rg" pitchFamily="34" charset="0"/>
-            </a:endParaRPr>
-          </a:p>
-        </p:txBody>
-      </p:sp>
-      <p:sp>
-        <p:nvSpPr>
-          <p:cNvPr id="32" name="TextBox 31">
-            <a:extLst>
-              <a:ext uri="{FF2B5EF4-FFF2-40B4-BE49-F238E27FC236}">
-                <a16:creationId xmlns:a16="http://schemas.microsoft.com/office/drawing/2014/main" id="{1C7521D4-1D27-3EDF-AADD-8DFA1958F7DD}"/>
-              </a:ext>
-            </a:extLst>
-          </p:cNvPr>
-          <p:cNvSpPr txBox="1"/>
-          <p:nvPr/>
-        </p:nvSpPr>
-        <p:spPr>
-          <a:xfrm>
-            <a:off x="5762480" y="5591413"/>
-            <a:ext cx="2070467" cy="338376"/>
-          </a:xfrm>
-          <a:prstGeom prst="rect">
-            <a:avLst/>
-          </a:prstGeom>
-        </p:spPr>
-        <p:txBody>
-          <a:bodyPr wrap="square" lIns="0" tIns="0" rIns="0" bIns="0" rtlCol="0">
-            <a:noAutofit/>
-          </a:bodyPr>
-          <a:lstStyle/>
-          <a:p>
-            <a:r>
-              <a:rPr lang="en-US" sz="2400" b="1" dirty="0">
-                <a:latin typeface="Vodafone Rg" pitchFamily="34" charset="0"/>
-              </a:rPr>
-              <a:t>Policy</a:t>
-            </a:r>
-          </a:p>
-        </p:txBody>
-      </p:sp>
-      <p:sp>
-        <p:nvSpPr>
-          <p:cNvPr id="34" name="Rectangle: Rounded Corners 33">
-            <a:extLst>
-              <a:ext uri="{FF2B5EF4-FFF2-40B4-BE49-F238E27FC236}">
-                <a16:creationId xmlns:a16="http://schemas.microsoft.com/office/drawing/2014/main" id="{FDE6158D-99DB-63F1-8853-E1324911C9D4}"/>
-              </a:ext>
-            </a:extLst>
-          </p:cNvPr>
-          <p:cNvSpPr/>
-          <p:nvPr/>
-        </p:nvSpPr>
-        <p:spPr>
-          <a:xfrm>
-            <a:off x="356598" y="4281842"/>
-            <a:ext cx="3451967" cy="1783637"/>
-          </a:xfrm>
-          <a:prstGeom prst="roundRect">
-            <a:avLst/>
-          </a:prstGeom>
-          <a:noFill/>
-          <a:ln w="57150" cap="flat" cmpd="sng" algn="ctr">
-            <a:solidFill>
-              <a:srgbClr val="0070C0"/>
-            </a:solidFill>
-            <a:prstDash val="solid"/>
-          </a:ln>
-          <a:effectLst/>
-        </p:spPr>
-        <p:style>
-          <a:lnRef idx="2">
-            <a:scrgbClr r="0" g="0" b="0"/>
-          </a:lnRef>
-          <a:fillRef idx="1">
-            <a:scrgbClr r="0" g="0" b="0"/>
-          </a:fillRef>
-          <a:effectRef idx="0">
-            <a:scrgbClr r="0" g="0" b="0"/>
-          </a:effectRef>
-          <a:fontRef idx="minor">
-            <a:schemeClr val="lt1"/>
-          </a:fontRef>
-        </p:style>
-        <p:txBody>
-          <a:bodyPr spcFirstLastPara="0" vert="horz" wrap="square" lIns="8467" tIns="8467" rIns="8467" bIns="8467" numCol="1" spcCol="1270" rtlCol="0" anchor="ctr" anchorCtr="0">
-            <a:noAutofit/>
-          </a:bodyPr>
-          <a:lstStyle/>
-          <a:p>
-            <a:pPr algn="ctr" defTabSz="592652">
-              <a:lnSpc>
-                <a:spcPct val="90000"/>
-              </a:lnSpc>
-              <a:spcBef>
-                <a:spcPct val="0"/>
-              </a:spcBef>
-              <a:spcAft>
-                <a:spcPct val="35000"/>
-              </a:spcAft>
-            </a:pPr>
-            <a:endParaRPr lang="en-US" sz="1333" dirty="0">
-              <a:solidFill>
-                <a:srgbClr val="34342B"/>
-              </a:solidFill>
-              <a:latin typeface="Vodafone Rg" pitchFamily="34" charset="0"/>
-            </a:endParaRPr>
-          </a:p>
-        </p:txBody>
-      </p:sp>
-      <p:sp>
-        <p:nvSpPr>
-          <p:cNvPr id="41" name="TextBox 40">
-            <a:extLst>
-              <a:ext uri="{FF2B5EF4-FFF2-40B4-BE49-F238E27FC236}">
-                <a16:creationId xmlns:a16="http://schemas.microsoft.com/office/drawing/2014/main" id="{C3AAE0E8-4A9C-902B-9CE7-D092465ACECC}"/>
-              </a:ext>
-            </a:extLst>
-          </p:cNvPr>
-          <p:cNvSpPr txBox="1"/>
-          <p:nvPr/>
-        </p:nvSpPr>
-        <p:spPr>
-          <a:xfrm>
-            <a:off x="1369896" y="5550354"/>
-            <a:ext cx="2070467" cy="338376"/>
-          </a:xfrm>
-          <a:prstGeom prst="rect">
-            <a:avLst/>
-          </a:prstGeom>
-        </p:spPr>
-        <p:txBody>
-          <a:bodyPr wrap="square" lIns="0" tIns="0" rIns="0" bIns="0" rtlCol="0">
-            <a:noAutofit/>
-          </a:bodyPr>
-          <a:lstStyle/>
-          <a:p>
-            <a:r>
-              <a:rPr lang="en-US" sz="2400" b="1" dirty="0">
-                <a:latin typeface="Vodafone Rg" pitchFamily="34" charset="0"/>
-              </a:rPr>
-              <a:t>Cloud NW</a:t>
-            </a:r>
-          </a:p>
-        </p:txBody>
-      </p:sp>
-      <p:pic>
-        <p:nvPicPr>
-          <p:cNvPr id="43" name="Graphic 42" descr="Internet Of Things with solid fill">
-            <a:extLst>
-              <a:ext uri="{FF2B5EF4-FFF2-40B4-BE49-F238E27FC236}">
-                <a16:creationId xmlns:a16="http://schemas.microsoft.com/office/drawing/2014/main" id="{814B40A2-C139-5806-E653-69D2D5187EDC}"/>
-              </a:ext>
-            </a:extLst>
-          </p:cNvPr>
-          <p:cNvPicPr>
-            <a:picLocks noChangeAspect="1"/>
-          </p:cNvPicPr>
-          <p:nvPr/>
-        </p:nvPicPr>
-        <p:blipFill>
-          <a:blip r:embed="rId6">
-            <a:extLst>
-              <a:ext uri="{96DAC541-7B7A-43D3-8B79-37D633B846F1}">
-                <asvg:svgBlip xmlns:asvg="http://schemas.microsoft.com/office/drawing/2016/SVG/main" r:embed="rId7"/>
-              </a:ext>
-            </a:extLst>
-          </a:blip>
-          <a:stretch>
-            <a:fillRect/>
-          </a:stretch>
-        </p:blipFill>
-        <p:spPr>
-          <a:xfrm>
-            <a:off x="1360900" y="4385586"/>
-            <a:ext cx="1219200" cy="1219200"/>
-          </a:xfrm>
-          <a:prstGeom prst="rect">
-            <a:avLst/>
-          </a:prstGeom>
-        </p:spPr>
-      </p:pic>
-      <p:sp>
-        <p:nvSpPr>
-          <p:cNvPr id="45" name="Arrow: Right 44">
-            <a:extLst>
-              <a:ext uri="{FF2B5EF4-FFF2-40B4-BE49-F238E27FC236}">
-                <a16:creationId xmlns:a16="http://schemas.microsoft.com/office/drawing/2014/main" id="{FCE7E6DE-38A2-BD46-48A8-1EA82BAC20E5}"/>
-              </a:ext>
-            </a:extLst>
-          </p:cNvPr>
-          <p:cNvSpPr/>
-          <p:nvPr/>
-        </p:nvSpPr>
-        <p:spPr>
-          <a:xfrm>
-            <a:off x="7902179" y="4927683"/>
-            <a:ext cx="747299" cy="340015"/>
-          </a:xfrm>
-          <a:prstGeom prst="rightArrow">
-            <a:avLst/>
-          </a:prstGeom>
-          <a:solidFill>
-            <a:srgbClr val="0070C0"/>
-          </a:solidFill>
-          <a:ln w="25400" cap="flat" cmpd="sng" algn="ctr">
-            <a:noFill/>
-            <a:prstDash val="solid"/>
-          </a:ln>
-          <a:effectLst/>
-        </p:spPr>
-        <p:style>
-          <a:lnRef idx="2">
-            <a:scrgbClr r="0" g="0" b="0"/>
-          </a:lnRef>
-          <a:fillRef idx="1">
-            <a:scrgbClr r="0" g="0" b="0"/>
-          </a:fillRef>
-          <a:effectRef idx="0">
-            <a:scrgbClr r="0" g="0" b="0"/>
-          </a:effectRef>
-          <a:fontRef idx="minor">
-            <a:schemeClr val="lt1"/>
-          </a:fontRef>
-        </p:style>
-        <p:txBody>
-          <a:bodyPr spcFirstLastPara="0" vert="horz" wrap="square" lIns="8467" tIns="8467" rIns="8467" bIns="8467" numCol="1" spcCol="1270" rtlCol="0" anchor="ctr" anchorCtr="0">
-            <a:noAutofit/>
-          </a:bodyPr>
-          <a:lstStyle/>
-          <a:p>
-            <a:pPr algn="ctr" defTabSz="592652">
-              <a:lnSpc>
-                <a:spcPct val="90000"/>
-              </a:lnSpc>
-              <a:spcBef>
-                <a:spcPct val="0"/>
-              </a:spcBef>
-              <a:spcAft>
-                <a:spcPct val="35000"/>
-              </a:spcAft>
-            </a:pPr>
-            <a:endParaRPr lang="en-US" sz="1333" dirty="0">
-              <a:solidFill>
-                <a:srgbClr val="34342B"/>
-              </a:solidFill>
-              <a:latin typeface="Vodafone Rg" pitchFamily="34" charset="0"/>
-            </a:endParaRPr>
-          </a:p>
-        </p:txBody>
-      </p:sp>
-      <p:sp>
-        <p:nvSpPr>
-          <p:cNvPr id="47" name="Rectangle 46">
-            <a:extLst>
-              <a:ext uri="{FF2B5EF4-FFF2-40B4-BE49-F238E27FC236}">
-                <a16:creationId xmlns:a16="http://schemas.microsoft.com/office/drawing/2014/main" id="{FCCFEEEA-839C-AB8F-3286-5B701F1B3015}"/>
-              </a:ext>
-            </a:extLst>
-          </p:cNvPr>
-          <p:cNvSpPr/>
-          <p:nvPr/>
-        </p:nvSpPr>
-        <p:spPr>
-          <a:xfrm>
-            <a:off x="8530134" y="1833396"/>
-            <a:ext cx="3292924" cy="1877568"/>
-          </a:xfrm>
-          <a:prstGeom prst="rect">
-            <a:avLst/>
-          </a:prstGeom>
-          <a:ln/>
-        </p:spPr>
-        <p:style>
-          <a:lnRef idx="2">
-            <a:schemeClr val="dk1"/>
-          </a:lnRef>
-          <a:fillRef idx="1">
-            <a:schemeClr val="lt1"/>
-          </a:fillRef>
-          <a:effectRef idx="0">
-            <a:schemeClr val="dk1"/>
-          </a:effectRef>
-          <a:fontRef idx="minor">
-            <a:schemeClr val="dk1"/>
-          </a:fontRef>
-        </p:style>
-        <p:txBody>
-          <a:bodyPr spcFirstLastPara="0" vert="horz" wrap="square" lIns="8467" tIns="8467" rIns="8467" bIns="8467" numCol="1" spcCol="1270" rtlCol="0" anchor="ctr" anchorCtr="0">
-            <a:noAutofit/>
-          </a:bodyPr>
-          <a:lstStyle/>
-          <a:p>
-            <a:pPr algn="ctr" defTabSz="592652">
-              <a:lnSpc>
-                <a:spcPct val="90000"/>
-              </a:lnSpc>
-              <a:spcBef>
-                <a:spcPct val="0"/>
-              </a:spcBef>
-              <a:spcAft>
-                <a:spcPct val="35000"/>
-              </a:spcAft>
-            </a:pPr>
-            <a:endParaRPr lang="en-US" sz="1333" dirty="0">
-              <a:solidFill>
-                <a:srgbClr val="34342B"/>
-              </a:solidFill>
-              <a:latin typeface="Vodafone Rg" pitchFamily="34" charset="0"/>
-            </a:endParaRPr>
-          </a:p>
-        </p:txBody>
-      </p:sp>
-      <p:sp>
-        <p:nvSpPr>
-          <p:cNvPr id="48" name="TextBox 47">
-            <a:extLst>
-              <a:ext uri="{FF2B5EF4-FFF2-40B4-BE49-F238E27FC236}">
-                <a16:creationId xmlns:a16="http://schemas.microsoft.com/office/drawing/2014/main" id="{5B64B5D5-352A-7792-C681-223F055B6771}"/>
-              </a:ext>
-            </a:extLst>
-          </p:cNvPr>
-          <p:cNvSpPr txBox="1"/>
-          <p:nvPr/>
-        </p:nvSpPr>
-        <p:spPr>
-          <a:xfrm>
-            <a:off x="8908086" y="1969651"/>
-            <a:ext cx="2657856" cy="554008"/>
-          </a:xfrm>
-          <a:prstGeom prst="rect">
-            <a:avLst/>
-          </a:prstGeom>
-        </p:spPr>
-        <p:txBody>
-          <a:bodyPr wrap="square" lIns="0" tIns="0" rIns="0" bIns="0" rtlCol="0">
-            <a:noAutofit/>
-          </a:bodyPr>
-          <a:lstStyle/>
-          <a:p>
-            <a:pPr algn="ctr"/>
-            <a:r>
-              <a:rPr lang="en-US" sz="2400" b="1" dirty="0">
-                <a:latin typeface="Vodafone Rg" pitchFamily="34" charset="0"/>
-              </a:rPr>
-              <a:t>VM </a:t>
-            </a:r>
-          </a:p>
-          <a:p>
-            <a:pPr algn="ctr"/>
-            <a:r>
-              <a:rPr lang="en-US" sz="2400" b="1" dirty="0">
-                <a:latin typeface="Vodafone Rg" pitchFamily="34" charset="0"/>
-              </a:rPr>
-              <a:t>Provisioning</a:t>
-            </a:r>
-          </a:p>
-        </p:txBody>
-      </p:sp>
-      <p:cxnSp>
-        <p:nvCxnSpPr>
-          <p:cNvPr id="52" name="Straight Connector 51">
-            <a:extLst>
-              <a:ext uri="{FF2B5EF4-FFF2-40B4-BE49-F238E27FC236}">
-                <a16:creationId xmlns:a16="http://schemas.microsoft.com/office/drawing/2014/main" id="{9CEB3322-552D-4897-9D07-4EC5E1E024F3}"/>
-              </a:ext>
-            </a:extLst>
-          </p:cNvPr>
-          <p:cNvCxnSpPr/>
-          <p:nvPr/>
-        </p:nvCxnSpPr>
-        <p:spPr>
-          <a:xfrm>
-            <a:off x="8908085" y="2723412"/>
-            <a:ext cx="2657856" cy="0"/>
-          </a:xfrm>
-          <a:prstGeom prst="line">
-            <a:avLst/>
-          </a:prstGeom>
-        </p:spPr>
-        <p:style>
-          <a:lnRef idx="1">
-            <a:schemeClr val="dk1"/>
-          </a:lnRef>
-          <a:fillRef idx="0">
-            <a:schemeClr val="dk1"/>
-          </a:fillRef>
-          <a:effectRef idx="0">
-            <a:schemeClr val="dk1"/>
-          </a:effectRef>
-          <a:fontRef idx="minor">
-            <a:schemeClr val="tx1"/>
-          </a:fontRef>
-        </p:style>
-      </p:cxnSp>
-      <p:sp>
-        <p:nvSpPr>
-          <p:cNvPr id="53" name="TextBox 52">
-            <a:extLst>
-              <a:ext uri="{FF2B5EF4-FFF2-40B4-BE49-F238E27FC236}">
-                <a16:creationId xmlns:a16="http://schemas.microsoft.com/office/drawing/2014/main" id="{A8E66689-D857-E283-C306-EEB31C714430}"/>
-              </a:ext>
-            </a:extLst>
-          </p:cNvPr>
-          <p:cNvSpPr txBox="1"/>
-          <p:nvPr/>
-        </p:nvSpPr>
-        <p:spPr>
-          <a:xfrm>
-            <a:off x="8725205" y="2772181"/>
-            <a:ext cx="2962656" cy="707135"/>
-          </a:xfrm>
-          <a:prstGeom prst="rect">
-            <a:avLst/>
-          </a:prstGeom>
-        </p:spPr>
-        <p:txBody>
-          <a:bodyPr wrap="square" lIns="0" tIns="0" rIns="0" bIns="0" rtlCol="0">
-            <a:noAutofit/>
-          </a:bodyPr>
-          <a:lstStyle/>
-          <a:p>
-            <a:endParaRPr lang="en-US" sz="2400" dirty="0">
-              <a:latin typeface="Vodafone Rg" pitchFamily="34" charset="0"/>
-            </a:endParaRPr>
-          </a:p>
-        </p:txBody>
-      </p:sp>
-      <p:sp>
-        <p:nvSpPr>
-          <p:cNvPr id="57" name="Rectangle 56">
-            <a:extLst>
-              <a:ext uri="{FF2B5EF4-FFF2-40B4-BE49-F238E27FC236}">
-                <a16:creationId xmlns:a16="http://schemas.microsoft.com/office/drawing/2014/main" id="{40C832D6-A556-151D-5FFE-2FA54EC048C0}"/>
-              </a:ext>
-            </a:extLst>
-          </p:cNvPr>
-          <p:cNvSpPr/>
-          <p:nvPr/>
-        </p:nvSpPr>
-        <p:spPr>
-          <a:xfrm>
-            <a:off x="4569415" y="1861591"/>
-            <a:ext cx="3292924" cy="1877568"/>
-          </a:xfrm>
-          <a:prstGeom prst="rect">
-            <a:avLst/>
-          </a:prstGeom>
-          <a:ln/>
-        </p:spPr>
-        <p:style>
-          <a:lnRef idx="2">
-            <a:schemeClr val="dk1"/>
-          </a:lnRef>
-          <a:fillRef idx="1">
-            <a:schemeClr val="lt1"/>
-          </a:fillRef>
-          <a:effectRef idx="0">
-            <a:schemeClr val="dk1"/>
-          </a:effectRef>
-          <a:fontRef idx="minor">
-            <a:schemeClr val="dk1"/>
-          </a:fontRef>
-        </p:style>
-        <p:txBody>
-          <a:bodyPr spcFirstLastPara="0" vert="horz" wrap="square" lIns="8467" tIns="8467" rIns="8467" bIns="8467" numCol="1" spcCol="1270" rtlCol="0" anchor="ctr" anchorCtr="0">
-            <a:noAutofit/>
-          </a:bodyPr>
-          <a:lstStyle/>
-          <a:p>
-            <a:pPr algn="ctr" defTabSz="592652">
-              <a:lnSpc>
-                <a:spcPct val="90000"/>
-              </a:lnSpc>
-              <a:spcBef>
-                <a:spcPct val="0"/>
-              </a:spcBef>
-              <a:spcAft>
-                <a:spcPct val="35000"/>
-              </a:spcAft>
-            </a:pPr>
-            <a:endParaRPr lang="en-US" sz="1333" dirty="0">
-              <a:solidFill>
-                <a:srgbClr val="34342B"/>
-              </a:solidFill>
-              <a:latin typeface="Vodafone Rg" pitchFamily="34" charset="0"/>
-            </a:endParaRPr>
-          </a:p>
-        </p:txBody>
-      </p:sp>
-      <p:sp>
-        <p:nvSpPr>
-          <p:cNvPr id="58" name="TextBox 57">
-            <a:extLst>
-              <a:ext uri="{FF2B5EF4-FFF2-40B4-BE49-F238E27FC236}">
-                <a16:creationId xmlns:a16="http://schemas.microsoft.com/office/drawing/2014/main" id="{6A146ED9-6AB1-E26B-8B36-526B4B8B36E2}"/>
-              </a:ext>
-            </a:extLst>
-          </p:cNvPr>
-          <p:cNvSpPr txBox="1"/>
-          <p:nvPr/>
-        </p:nvSpPr>
-        <p:spPr>
-          <a:xfrm>
-            <a:off x="5385885" y="1912223"/>
-            <a:ext cx="2327588" cy="707136"/>
-          </a:xfrm>
-          <a:prstGeom prst="rect">
-            <a:avLst/>
-          </a:prstGeom>
-        </p:spPr>
-        <p:txBody>
-          <a:bodyPr wrap="square" lIns="0" tIns="0" rIns="0" bIns="0" rtlCol="0">
-            <a:noAutofit/>
-          </a:bodyPr>
-          <a:lstStyle/>
-          <a:p>
-            <a:pPr algn="ctr"/>
-            <a:r>
-              <a:rPr lang="en-US" sz="2400" b="1" dirty="0">
-                <a:latin typeface="Vodafone Rg" pitchFamily="34" charset="0"/>
-              </a:rPr>
-              <a:t>Security Provisioning</a:t>
-            </a:r>
-          </a:p>
-        </p:txBody>
-      </p:sp>
-      <p:cxnSp>
-        <p:nvCxnSpPr>
-          <p:cNvPr id="59" name="Straight Connector 58">
-            <a:extLst>
-              <a:ext uri="{FF2B5EF4-FFF2-40B4-BE49-F238E27FC236}">
-                <a16:creationId xmlns:a16="http://schemas.microsoft.com/office/drawing/2014/main" id="{AD1D3BE6-0B8E-19D5-3728-7B30E4042267}"/>
-              </a:ext>
-            </a:extLst>
-          </p:cNvPr>
-          <p:cNvCxnSpPr/>
-          <p:nvPr/>
-        </p:nvCxnSpPr>
-        <p:spPr>
-          <a:xfrm>
-            <a:off x="5055616" y="2714752"/>
-            <a:ext cx="2657856" cy="0"/>
-          </a:xfrm>
-          <a:prstGeom prst="line">
-            <a:avLst/>
-          </a:prstGeom>
-        </p:spPr>
-        <p:style>
-          <a:lnRef idx="1">
-            <a:schemeClr val="dk1"/>
-          </a:lnRef>
-          <a:fillRef idx="0">
-            <a:schemeClr val="dk1"/>
-          </a:fillRef>
-          <a:effectRef idx="0">
-            <a:schemeClr val="dk1"/>
-          </a:effectRef>
-          <a:fontRef idx="minor">
-            <a:schemeClr val="tx1"/>
-          </a:fontRef>
-        </p:style>
-      </p:cxnSp>
-      <p:sp>
-        <p:nvSpPr>
-          <p:cNvPr id="60" name="TextBox 59">
-            <a:extLst>
-              <a:ext uri="{FF2B5EF4-FFF2-40B4-BE49-F238E27FC236}">
-                <a16:creationId xmlns:a16="http://schemas.microsoft.com/office/drawing/2014/main" id="{84D76E7D-DB53-502F-13F0-8064E6765094}"/>
-              </a:ext>
-            </a:extLst>
-          </p:cNvPr>
-          <p:cNvSpPr txBox="1"/>
-          <p:nvPr/>
-        </p:nvSpPr>
-        <p:spPr>
-          <a:xfrm>
-            <a:off x="4872736" y="2763521"/>
-            <a:ext cx="2962656" cy="707135"/>
-          </a:xfrm>
-          <a:prstGeom prst="rect">
-            <a:avLst/>
-          </a:prstGeom>
-        </p:spPr>
-        <p:txBody>
-          <a:bodyPr wrap="square" lIns="0" tIns="0" rIns="0" bIns="0" rtlCol="0">
-            <a:noAutofit/>
-          </a:bodyPr>
-          <a:lstStyle/>
-          <a:p>
-            <a:endParaRPr lang="en-US" sz="2400" dirty="0">
-              <a:latin typeface="Vodafone Rg" pitchFamily="34" charset="0"/>
-            </a:endParaRPr>
-          </a:p>
-        </p:txBody>
-      </p:sp>
-      <p:sp>
-        <p:nvSpPr>
-          <p:cNvPr id="63" name="Rectangle 62">
-            <a:extLst>
-              <a:ext uri="{FF2B5EF4-FFF2-40B4-BE49-F238E27FC236}">
-                <a16:creationId xmlns:a16="http://schemas.microsoft.com/office/drawing/2014/main" id="{16F8E527-D9DA-2629-C9F0-78B4D1C5F11E}"/>
-              </a:ext>
-            </a:extLst>
-          </p:cNvPr>
-          <p:cNvSpPr/>
-          <p:nvPr/>
-        </p:nvSpPr>
-        <p:spPr>
-          <a:xfrm>
-            <a:off x="473116" y="1891793"/>
-            <a:ext cx="3292924" cy="1877568"/>
-          </a:xfrm>
-          <a:prstGeom prst="rect">
-            <a:avLst/>
-          </a:prstGeom>
-          <a:ln/>
-        </p:spPr>
-        <p:style>
-          <a:lnRef idx="2">
-            <a:schemeClr val="dk1"/>
-          </a:lnRef>
-          <a:fillRef idx="1">
-            <a:schemeClr val="lt1"/>
-          </a:fillRef>
-          <a:effectRef idx="0">
-            <a:schemeClr val="dk1"/>
-          </a:effectRef>
-          <a:fontRef idx="minor">
-            <a:schemeClr val="dk1"/>
-          </a:fontRef>
-        </p:style>
-        <p:txBody>
-          <a:bodyPr spcFirstLastPara="0" vert="horz" wrap="square" lIns="8467" tIns="8467" rIns="8467" bIns="8467" numCol="1" spcCol="1270" rtlCol="0" anchor="ctr" anchorCtr="0">
-            <a:noAutofit/>
-          </a:bodyPr>
-          <a:lstStyle/>
-          <a:p>
-            <a:pPr algn="ctr" defTabSz="592652">
-              <a:lnSpc>
-                <a:spcPct val="90000"/>
-              </a:lnSpc>
-              <a:spcBef>
-                <a:spcPct val="0"/>
-              </a:spcBef>
-              <a:spcAft>
-                <a:spcPct val="35000"/>
-              </a:spcAft>
-            </a:pPr>
-            <a:endParaRPr lang="en-US" sz="1333" dirty="0">
-              <a:solidFill>
-                <a:srgbClr val="34342B"/>
-              </a:solidFill>
-              <a:latin typeface="Vodafone Rg" pitchFamily="34" charset="0"/>
-            </a:endParaRPr>
-          </a:p>
-        </p:txBody>
-      </p:sp>
-      <p:sp>
-        <p:nvSpPr>
-          <p:cNvPr id="65" name="TextBox 64">
-            <a:extLst>
-              <a:ext uri="{FF2B5EF4-FFF2-40B4-BE49-F238E27FC236}">
-                <a16:creationId xmlns:a16="http://schemas.microsoft.com/office/drawing/2014/main" id="{8D3AE9CB-80C5-8620-BDC4-C4E47A240943}"/>
-              </a:ext>
-            </a:extLst>
-          </p:cNvPr>
-          <p:cNvSpPr txBox="1"/>
-          <p:nvPr/>
-        </p:nvSpPr>
-        <p:spPr>
-          <a:xfrm>
-            <a:off x="1181336" y="2028048"/>
-            <a:ext cx="2327588" cy="707136"/>
-          </a:xfrm>
-          <a:prstGeom prst="rect">
-            <a:avLst/>
-          </a:prstGeom>
-        </p:spPr>
-        <p:txBody>
-          <a:bodyPr wrap="square" lIns="0" tIns="0" rIns="0" bIns="0" rtlCol="0">
-            <a:noAutofit/>
-          </a:bodyPr>
-          <a:lstStyle/>
-          <a:p>
-            <a:pPr algn="ctr"/>
-            <a:r>
-              <a:rPr lang="en-US" sz="2400" b="1" dirty="0">
-                <a:latin typeface="Vodafone Rg" pitchFamily="34" charset="0"/>
-              </a:rPr>
-              <a:t>Network</a:t>
-            </a:r>
-          </a:p>
-          <a:p>
-            <a:pPr algn="ctr"/>
-            <a:r>
-              <a:rPr lang="en-US" sz="2400" b="1" dirty="0">
-                <a:latin typeface="Vodafone Rg" pitchFamily="34" charset="0"/>
-              </a:rPr>
-              <a:t>Provisioning</a:t>
-            </a:r>
-          </a:p>
-        </p:txBody>
-      </p:sp>
-      <p:cxnSp>
-        <p:nvCxnSpPr>
-          <p:cNvPr id="66" name="Straight Connector 65">
-            <a:extLst>
-              <a:ext uri="{FF2B5EF4-FFF2-40B4-BE49-F238E27FC236}">
-                <a16:creationId xmlns:a16="http://schemas.microsoft.com/office/drawing/2014/main" id="{57609DCE-2AF8-705D-8054-28C16DFAD24D}"/>
-              </a:ext>
-            </a:extLst>
-          </p:cNvPr>
-          <p:cNvCxnSpPr/>
-          <p:nvPr/>
-        </p:nvCxnSpPr>
-        <p:spPr>
-          <a:xfrm>
-            <a:off x="851067" y="2781809"/>
-            <a:ext cx="2657856" cy="0"/>
-          </a:xfrm>
-          <a:prstGeom prst="line">
-            <a:avLst/>
-          </a:prstGeom>
-        </p:spPr>
-        <p:style>
-          <a:lnRef idx="1">
-            <a:schemeClr val="dk1"/>
-          </a:lnRef>
-          <a:fillRef idx="0">
-            <a:schemeClr val="dk1"/>
-          </a:fillRef>
-          <a:effectRef idx="0">
-            <a:schemeClr val="dk1"/>
-          </a:effectRef>
-          <a:fontRef idx="minor">
-            <a:schemeClr val="tx1"/>
-          </a:fontRef>
-        </p:style>
-      </p:cxnSp>
-      <p:sp>
-        <p:nvSpPr>
-          <p:cNvPr id="67" name="TextBox 66">
-            <a:extLst>
-              <a:ext uri="{FF2B5EF4-FFF2-40B4-BE49-F238E27FC236}">
-                <a16:creationId xmlns:a16="http://schemas.microsoft.com/office/drawing/2014/main" id="{A1165CCC-6127-7E00-28E0-53F2C9B6331E}"/>
-              </a:ext>
-            </a:extLst>
-          </p:cNvPr>
-          <p:cNvSpPr txBox="1"/>
-          <p:nvPr/>
-        </p:nvSpPr>
-        <p:spPr>
-          <a:xfrm>
-            <a:off x="668187" y="2830578"/>
-            <a:ext cx="2962656" cy="707135"/>
-          </a:xfrm>
-          <a:prstGeom prst="rect">
-            <a:avLst/>
-          </a:prstGeom>
-        </p:spPr>
-        <p:txBody>
-          <a:bodyPr wrap="square" lIns="0" tIns="0" rIns="0" bIns="0" rtlCol="0">
-            <a:noAutofit/>
-          </a:bodyPr>
-          <a:lstStyle/>
-          <a:p>
-            <a:endParaRPr lang="en-US" sz="2400" dirty="0">
-              <a:latin typeface="Vodafone Rg" pitchFamily="34" charset="0"/>
-            </a:endParaRPr>
-          </a:p>
-        </p:txBody>
-      </p:sp>
-      <p:sp>
-        <p:nvSpPr>
-          <p:cNvPr id="68" name="TextBox 67">
-            <a:extLst>
-              <a:ext uri="{FF2B5EF4-FFF2-40B4-BE49-F238E27FC236}">
-                <a16:creationId xmlns:a16="http://schemas.microsoft.com/office/drawing/2014/main" id="{29DBC2D7-B9D0-7449-A308-DC3F21E56C96}"/>
-              </a:ext>
-            </a:extLst>
-          </p:cNvPr>
-          <p:cNvSpPr txBox="1"/>
-          <p:nvPr/>
-        </p:nvSpPr>
-        <p:spPr>
-          <a:xfrm>
-            <a:off x="572446" y="2888088"/>
-            <a:ext cx="3292924" cy="707136"/>
-          </a:xfrm>
-          <a:prstGeom prst="rect">
-            <a:avLst/>
-          </a:prstGeom>
-        </p:spPr>
-        <p:txBody>
-          <a:bodyPr wrap="square" lIns="0" tIns="0" rIns="0" bIns="0" rtlCol="0">
-            <a:noAutofit/>
-          </a:bodyPr>
-          <a:lstStyle/>
-          <a:p>
-            <a:pPr marL="380990" indent="-380990">
-              <a:buFont typeface="Arial" panose="020B0604020202020204" pitchFamily="34" charset="0"/>
-              <a:buChar char="•"/>
-            </a:pPr>
-            <a:r>
-              <a:rPr lang="en-US" sz="2133" dirty="0">
-                <a:latin typeface="Vodafone Rg" pitchFamily="34" charset="0"/>
-              </a:rPr>
-              <a:t>Landing Zone connectivity</a:t>
-            </a:r>
-          </a:p>
-          <a:p>
-            <a:pPr marL="380990" indent="-380990">
-              <a:buFont typeface="Arial" panose="020B0604020202020204" pitchFamily="34" charset="0"/>
-              <a:buChar char="•"/>
-            </a:pPr>
-            <a:r>
-              <a:rPr lang="en-US" sz="2133" dirty="0">
-                <a:latin typeface="Vodafone Rg" pitchFamily="34" charset="0"/>
-              </a:rPr>
-              <a:t>Terraform</a:t>
-            </a:r>
-          </a:p>
-        </p:txBody>
-      </p:sp>
-      <p:sp>
-        <p:nvSpPr>
-          <p:cNvPr id="71" name="TextBox 70">
-            <a:extLst>
-              <a:ext uri="{FF2B5EF4-FFF2-40B4-BE49-F238E27FC236}">
-                <a16:creationId xmlns:a16="http://schemas.microsoft.com/office/drawing/2014/main" id="{8A83D185-BFF0-1A96-A06B-EC9C5B85A435}"/>
-              </a:ext>
-            </a:extLst>
-          </p:cNvPr>
-          <p:cNvSpPr txBox="1"/>
-          <p:nvPr/>
-        </p:nvSpPr>
-        <p:spPr>
-          <a:xfrm>
-            <a:off x="4775201" y="2830577"/>
-            <a:ext cx="2994084" cy="707136"/>
-          </a:xfrm>
-          <a:prstGeom prst="rect">
-            <a:avLst/>
-          </a:prstGeom>
-        </p:spPr>
-        <p:txBody>
-          <a:bodyPr wrap="square" lIns="0" tIns="0" rIns="0" bIns="0" rtlCol="0">
-            <a:noAutofit/>
-          </a:bodyPr>
-          <a:lstStyle/>
-          <a:p>
-            <a:pPr marL="380990" indent="-380990">
-              <a:buFont typeface="Arial" panose="020B0604020202020204" pitchFamily="34" charset="0"/>
-              <a:buChar char="•"/>
-            </a:pPr>
-            <a:r>
-              <a:rPr lang="en-US" sz="2133" dirty="0">
-                <a:latin typeface="Vodafone Rg" pitchFamily="34" charset="0"/>
-              </a:rPr>
-              <a:t>Auto Policy push</a:t>
-            </a:r>
-          </a:p>
-          <a:p>
-            <a:pPr marL="380990" indent="-380990">
-              <a:buFont typeface="Arial" panose="020B0604020202020204" pitchFamily="34" charset="0"/>
-              <a:buChar char="•"/>
-            </a:pPr>
-            <a:r>
-              <a:rPr lang="en-US" sz="2133" dirty="0">
-                <a:latin typeface="Vodafone Rg" pitchFamily="34" charset="0"/>
-              </a:rPr>
-              <a:t>Azure DevOps</a:t>
-            </a:r>
-          </a:p>
-        </p:txBody>
-      </p:sp>
-      <p:sp>
-        <p:nvSpPr>
-          <p:cNvPr id="72" name="TextBox 71">
-            <a:extLst>
-              <a:ext uri="{FF2B5EF4-FFF2-40B4-BE49-F238E27FC236}">
-                <a16:creationId xmlns:a16="http://schemas.microsoft.com/office/drawing/2014/main" id="{8124772D-680A-DF78-6685-829FD1B286EA}"/>
-              </a:ext>
-            </a:extLst>
-          </p:cNvPr>
-          <p:cNvSpPr txBox="1"/>
-          <p:nvPr/>
-        </p:nvSpPr>
-        <p:spPr>
-          <a:xfrm>
-            <a:off x="8666819" y="2881905"/>
-            <a:ext cx="2994084" cy="707136"/>
-          </a:xfrm>
-          <a:prstGeom prst="rect">
-            <a:avLst/>
-          </a:prstGeom>
-        </p:spPr>
-        <p:txBody>
-          <a:bodyPr wrap="square" lIns="0" tIns="0" rIns="0" bIns="0" rtlCol="0">
-            <a:noAutofit/>
-          </a:bodyPr>
-          <a:lstStyle/>
-          <a:p>
-            <a:pPr marL="380990" indent="-380990">
-              <a:buFont typeface="Arial" panose="020B0604020202020204" pitchFamily="34" charset="0"/>
-              <a:buChar char="•"/>
-            </a:pPr>
-            <a:r>
-              <a:rPr lang="en-US" sz="2133" dirty="0">
-                <a:latin typeface="Vodafone Rg" pitchFamily="34" charset="0"/>
-              </a:rPr>
-              <a:t>Landing Zone Compute</a:t>
-            </a:r>
-          </a:p>
-          <a:p>
-            <a:pPr marL="380990" indent="-380990">
-              <a:buFont typeface="Arial" panose="020B0604020202020204" pitchFamily="34" charset="0"/>
-              <a:buChar char="•"/>
-            </a:pPr>
-            <a:r>
-              <a:rPr lang="en-US" sz="2133" dirty="0">
-                <a:latin typeface="Vodafone Rg" pitchFamily="34" charset="0"/>
-              </a:rPr>
-              <a:t>Prov at scale</a:t>
-            </a:r>
-          </a:p>
-        </p:txBody>
-      </p:sp>
-      <p:sp>
-        <p:nvSpPr>
-          <p:cNvPr id="74" name="TextBox 73">
-            <a:extLst>
-              <a:ext uri="{FF2B5EF4-FFF2-40B4-BE49-F238E27FC236}">
-                <a16:creationId xmlns:a16="http://schemas.microsoft.com/office/drawing/2014/main" id="{9677193B-D9AC-DACD-9F3E-FF868C34145B}"/>
-              </a:ext>
-            </a:extLst>
-          </p:cNvPr>
-          <p:cNvSpPr txBox="1"/>
-          <p:nvPr/>
-        </p:nvSpPr>
-        <p:spPr>
-          <a:xfrm>
-            <a:off x="621793" y="963169"/>
-            <a:ext cx="11105828" cy="694943"/>
-          </a:xfrm>
-          <a:prstGeom prst="rect">
-            <a:avLst/>
-          </a:prstGeom>
-        </p:spPr>
-        <p:txBody>
-          <a:bodyPr wrap="square" lIns="0" tIns="0" rIns="0" bIns="0" rtlCol="0">
-            <a:noAutofit/>
-          </a:bodyPr>
-          <a:lstStyle/>
-          <a:p>
-            <a:r>
-              <a:rPr lang="en-US" sz="2133" dirty="0">
-                <a:latin typeface="Vodafone Rg" pitchFamily="34" charset="0"/>
-              </a:rPr>
-              <a:t>E2E Provisioning </a:t>
-            </a:r>
-          </a:p>
-          <a:p>
-            <a:r>
-              <a:rPr lang="en-US" sz="2133" dirty="0">
-                <a:latin typeface="Vodafone Rg" pitchFamily="34" charset="0"/>
-              </a:rPr>
-              <a:t>DCC Architecture</a:t>
-            </a:r>
-          </a:p>
-        </p:txBody>
-      </p:sp>
-    </p:spTree>
-    <p:extLst>
-      <p:ext uri="{BB962C8B-B14F-4D97-AF65-F5344CB8AC3E}">
-        <p14:creationId xmlns:p14="http://schemas.microsoft.com/office/powerpoint/2010/main" val="2129696808"/>
-      </p:ext>
-    </p:extLst>
-  </p:cSld>
-  <p:clrMapOvr>
-    <a:masterClrMapping/>
-  </p:clrMapOvr>
-</p:sld>
-</file>
-
-<file path=ppt/slides/slide3.xml><?xml version="1.0" encoding="utf-8"?>
 <p:sld xmlns:a="http://schemas.openxmlformats.org/drawingml/2006/main" xmlns:r="http://schemas.openxmlformats.org/officeDocument/2006/relationships" xmlns:p="http://schemas.openxmlformats.org/presentationml/2006/main">
   <p:cSld>
     <p:spTree>
@@ -10158,7 +8622,7 @@
 </p:sld>
 </file>
 
-<file path=ppt/slides/slide4.xml><?xml version="1.0" encoding="utf-8"?>
+<file path=ppt/slides/slide3.xml><?xml version="1.0" encoding="utf-8"?>
 <p:sld xmlns:a="http://schemas.openxmlformats.org/drawingml/2006/main" xmlns:r="http://schemas.openxmlformats.org/officeDocument/2006/relationships" xmlns:p="http://schemas.openxmlformats.org/presentationml/2006/main">
   <p:cSld>
     <p:spTree>
@@ -10741,7 +9205,7 @@
                 <a:tabLst/>
                 <a:defRPr/>
               </a:pPr>
-              <a:t>4</a:t>
+              <a:t>3</a:t>
             </a:fld>
             <a:endParaRPr kumimoji="0" lang="en-US" sz="1000" b="0" i="0" u="none" strike="noStrike" kern="1200" cap="none" spc="0" normalizeH="0" baseline="0" noProof="0" dirty="0">
               <a:ln>
@@ -15788,7 +14252,7 @@
 </p:sld>
 </file>
 
-<file path=ppt/slides/slide5.xml><?xml version="1.0" encoding="utf-8"?>
+<file path=ppt/slides/slide4.xml><?xml version="1.0" encoding="utf-8"?>
 <p:sld xmlns:a="http://schemas.openxmlformats.org/drawingml/2006/main" xmlns:r="http://schemas.openxmlformats.org/officeDocument/2006/relationships" xmlns:p="http://schemas.openxmlformats.org/presentationml/2006/main">
   <p:cSld>
     <p:spTree>
@@ -16359,7 +14823,7 @@
                 <a:tabLst/>
                 <a:defRPr/>
               </a:pPr>
-              <a:t>5</a:t>
+              <a:t>4</a:t>
             </a:fld>
             <a:endParaRPr kumimoji="0" lang="en-US" sz="1000" b="0" i="0" u="none" strike="noStrike" kern="1200" cap="none" spc="0" normalizeH="0" baseline="0" noProof="0" dirty="0">
               <a:ln>
@@ -22152,7 +20616,7 @@
 </p:sld>
 </file>
 
-<file path=ppt/slides/slide6.xml><?xml version="1.0" encoding="utf-8"?>
+<file path=ppt/slides/slide5.xml><?xml version="1.0" encoding="utf-8"?>
 <p:sld xmlns:a="http://schemas.openxmlformats.org/drawingml/2006/main" xmlns:r="http://schemas.openxmlformats.org/officeDocument/2006/relationships" xmlns:p="http://schemas.openxmlformats.org/presentationml/2006/main">
   <p:cSld>
     <p:spTree>
